--- a/docs/pptx/carbo/ritu-carbo-linsubhr-dosedisc-sideeffect.pptx
+++ b/docs/pptx/carbo/ritu-carbo-linsubhr-dosedisc-sideeffect.pptx
@@ -2443,7 +2443,7 @@
           </p:nvSpPr>
           <p:spPr>
             <a:xfrm>
-              <a:off x="909675" y="1896563"/>
+              <a:off x="911833" y="1896563"/>
               <a:ext cx="0" cy="3826579"/>
             </a:xfrm>
             <a:custGeom>
@@ -2486,7 +2486,7 @@
           </p:nvSpPr>
           <p:spPr>
             <a:xfrm>
-              <a:off x="3323794" y="1896563"/>
+              <a:off x="3322810" y="1896563"/>
               <a:ext cx="0" cy="3826579"/>
             </a:xfrm>
             <a:custGeom>
@@ -2529,7 +2529,7 @@
           </p:nvSpPr>
           <p:spPr>
             <a:xfrm>
-              <a:off x="5737913" y="1896563"/>
+              <a:off x="5733788" y="1896563"/>
               <a:ext cx="0" cy="3826579"/>
             </a:xfrm>
             <a:custGeom>
@@ -2572,7 +2572,7 @@
           </p:nvSpPr>
           <p:spPr>
             <a:xfrm>
-              <a:off x="8152032" y="1896563"/>
+              <a:off x="8144765" y="1896563"/>
               <a:ext cx="0" cy="3826579"/>
             </a:xfrm>
             <a:custGeom>
@@ -2830,7 +2830,7 @@
           </p:nvSpPr>
           <p:spPr>
             <a:xfrm>
-              <a:off x="2116734" y="1896563"/>
+              <a:off x="2117321" y="1896563"/>
               <a:ext cx="0" cy="3826579"/>
             </a:xfrm>
             <a:custGeom>
@@ -2873,7 +2873,7 @@
           </p:nvSpPr>
           <p:spPr>
             <a:xfrm>
-              <a:off x="4530853" y="1896563"/>
+              <a:off x="4528299" y="1896563"/>
               <a:ext cx="0" cy="3826579"/>
             </a:xfrm>
             <a:custGeom>
@@ -2916,7 +2916,7 @@
           </p:nvSpPr>
           <p:spPr>
             <a:xfrm>
-              <a:off x="6944973" y="1896563"/>
+              <a:off x="6939276" y="1896563"/>
               <a:ext cx="0" cy="3826579"/>
             </a:xfrm>
             <a:custGeom>
@@ -2960,587 +2960,584 @@
           <p:spPr>
             <a:xfrm>
               <a:off x="1172049" y="1896563"/>
-              <a:ext cx="7090630" cy="3465764"/>
+              <a:ext cx="7090630" cy="3466018"/>
             </a:xfrm>
             <a:custGeom>
               <a:avLst/>
               <a:pathLst>
-                <a:path w="7090630" h="3465764">
+                <a:path w="7090630" h="3466018">
                   <a:moveTo>
-                    <a:pt x="0" y="2066601"/>
+                    <a:pt x="0" y="2053281"/>
                   </a:moveTo>
                   <a:lnTo>
-                    <a:pt x="71622" y="2087150"/>
-                  </a:lnTo>
-                  <a:lnTo>
-                    <a:pt x="143245" y="2107432"/>
-                  </a:lnTo>
-                  <a:lnTo>
-                    <a:pt x="214867" y="2127451"/>
-                  </a:lnTo>
-                  <a:lnTo>
-                    <a:pt x="286490" y="2147211"/>
-                  </a:lnTo>
-                  <a:lnTo>
-                    <a:pt x="358112" y="2166714"/>
-                  </a:lnTo>
-                  <a:lnTo>
-                    <a:pt x="429735" y="2185966"/>
-                  </a:lnTo>
-                  <a:lnTo>
-                    <a:pt x="501357" y="2204967"/>
-                  </a:lnTo>
-                  <a:lnTo>
-                    <a:pt x="572980" y="2223723"/>
-                  </a:lnTo>
-                  <a:lnTo>
-                    <a:pt x="644602" y="2242236"/>
-                  </a:lnTo>
-                  <a:lnTo>
-                    <a:pt x="716225" y="2260508"/>
-                  </a:lnTo>
-                  <a:lnTo>
-                    <a:pt x="787847" y="2278544"/>
-                  </a:lnTo>
-                  <a:lnTo>
-                    <a:pt x="859470" y="2296347"/>
-                  </a:lnTo>
-                  <a:lnTo>
-                    <a:pt x="931092" y="2313918"/>
-                  </a:lnTo>
-                  <a:lnTo>
-                    <a:pt x="1002715" y="2331262"/>
-                  </a:lnTo>
-                  <a:lnTo>
-                    <a:pt x="1074337" y="2348382"/>
-                  </a:lnTo>
-                  <a:lnTo>
-                    <a:pt x="1145960" y="2365279"/>
-                  </a:lnTo>
-                  <a:lnTo>
-                    <a:pt x="1217582" y="2381958"/>
-                  </a:lnTo>
-                  <a:lnTo>
-                    <a:pt x="1289205" y="2398420"/>
-                  </a:lnTo>
-                  <a:lnTo>
-                    <a:pt x="1360827" y="2414670"/>
-                  </a:lnTo>
-                  <a:lnTo>
-                    <a:pt x="1432450" y="2430708"/>
-                  </a:lnTo>
-                  <a:lnTo>
-                    <a:pt x="1504073" y="2446539"/>
-                  </a:lnTo>
-                  <a:lnTo>
-                    <a:pt x="1575695" y="2462165"/>
-                  </a:lnTo>
-                  <a:lnTo>
-                    <a:pt x="1647318" y="2477589"/>
-                  </a:lnTo>
-                  <a:lnTo>
-                    <a:pt x="1718940" y="2492812"/>
-                  </a:lnTo>
-                  <a:lnTo>
-                    <a:pt x="1790563" y="2507839"/>
-                  </a:lnTo>
-                  <a:lnTo>
-                    <a:pt x="1862185" y="2522670"/>
-                  </a:lnTo>
-                  <a:lnTo>
-                    <a:pt x="1933808" y="2537310"/>
-                  </a:lnTo>
-                  <a:lnTo>
-                    <a:pt x="2005430" y="2551760"/>
-                  </a:lnTo>
-                  <a:lnTo>
-                    <a:pt x="2077053" y="2566022"/>
-                  </a:lnTo>
-                  <a:lnTo>
-                    <a:pt x="2148675" y="2580100"/>
-                  </a:lnTo>
-                  <a:lnTo>
-                    <a:pt x="2220298" y="2593996"/>
-                  </a:lnTo>
-                  <a:lnTo>
-                    <a:pt x="2291920" y="2607711"/>
-                  </a:lnTo>
-                  <a:lnTo>
-                    <a:pt x="2363543" y="2621249"/>
-                  </a:lnTo>
-                  <a:lnTo>
-                    <a:pt x="2435165" y="2634611"/>
-                  </a:lnTo>
-                  <a:lnTo>
-                    <a:pt x="2506788" y="2647801"/>
-                  </a:lnTo>
-                  <a:lnTo>
-                    <a:pt x="2578410" y="2660819"/>
-                  </a:lnTo>
-                  <a:lnTo>
-                    <a:pt x="2650033" y="2673669"/>
-                  </a:lnTo>
-                  <a:lnTo>
-                    <a:pt x="2721655" y="2686352"/>
-                  </a:lnTo>
-                  <a:lnTo>
-                    <a:pt x="2793278" y="2698871"/>
-                  </a:lnTo>
-                  <a:lnTo>
-                    <a:pt x="2864901" y="2711228"/>
-                  </a:lnTo>
-                  <a:lnTo>
-                    <a:pt x="2936523" y="2723424"/>
-                  </a:lnTo>
-                  <a:lnTo>
-                    <a:pt x="3008146" y="2735463"/>
-                  </a:lnTo>
-                  <a:lnTo>
-                    <a:pt x="3079768" y="2747346"/>
-                  </a:lnTo>
-                  <a:lnTo>
-                    <a:pt x="3151391" y="2759074"/>
-                  </a:lnTo>
-                  <a:lnTo>
-                    <a:pt x="3223013" y="2770651"/>
-                  </a:lnTo>
-                  <a:lnTo>
-                    <a:pt x="3294636" y="2782078"/>
-                  </a:lnTo>
-                  <a:lnTo>
-                    <a:pt x="3366258" y="2755801"/>
-                  </a:lnTo>
-                  <a:lnTo>
-                    <a:pt x="3437881" y="2725368"/>
-                  </a:lnTo>
-                  <a:lnTo>
-                    <a:pt x="3509503" y="2693902"/>
-                  </a:lnTo>
-                  <a:lnTo>
-                    <a:pt x="3581126" y="2661369"/>
-                  </a:lnTo>
-                  <a:lnTo>
-                    <a:pt x="3652748" y="2627731"/>
-                  </a:lnTo>
-                  <a:lnTo>
-                    <a:pt x="3724371" y="2592952"/>
-                  </a:lnTo>
-                  <a:lnTo>
-                    <a:pt x="3795993" y="2556993"/>
-                  </a:lnTo>
-                  <a:lnTo>
-                    <a:pt x="3867616" y="2519813"/>
-                  </a:lnTo>
-                  <a:lnTo>
-                    <a:pt x="3939238" y="2481372"/>
-                  </a:lnTo>
-                  <a:lnTo>
-                    <a:pt x="4010861" y="2441627"/>
-                  </a:lnTo>
-                  <a:lnTo>
-                    <a:pt x="4082483" y="2400533"/>
-                  </a:lnTo>
-                  <a:lnTo>
-                    <a:pt x="4154106" y="2358044"/>
-                  </a:lnTo>
-                  <a:lnTo>
-                    <a:pt x="4225729" y="2314114"/>
-                  </a:lnTo>
-                  <a:lnTo>
-                    <a:pt x="4297351" y="2268692"/>
-                  </a:lnTo>
-                  <a:lnTo>
-                    <a:pt x="4368974" y="2221730"/>
-                  </a:lnTo>
-                  <a:lnTo>
-                    <a:pt x="4440596" y="2173174"/>
-                  </a:lnTo>
-                  <a:lnTo>
-                    <a:pt x="4512219" y="2122970"/>
-                  </a:lnTo>
-                  <a:lnTo>
-                    <a:pt x="4583841" y="2071063"/>
-                  </a:lnTo>
-                  <a:lnTo>
-                    <a:pt x="4655464" y="2017394"/>
-                  </a:lnTo>
-                  <a:lnTo>
-                    <a:pt x="4727086" y="1961904"/>
-                  </a:lnTo>
-                  <a:lnTo>
-                    <a:pt x="4798709" y="1904531"/>
-                  </a:lnTo>
-                  <a:lnTo>
-                    <a:pt x="4870331" y="1845211"/>
-                  </a:lnTo>
-                  <a:lnTo>
-                    <a:pt x="4941954" y="1783878"/>
-                  </a:lnTo>
-                  <a:lnTo>
-                    <a:pt x="5013576" y="1720464"/>
-                  </a:lnTo>
-                  <a:lnTo>
-                    <a:pt x="5085199" y="1654898"/>
-                  </a:lnTo>
-                  <a:lnTo>
-                    <a:pt x="5156821" y="1587108"/>
-                  </a:lnTo>
-                  <a:lnTo>
-                    <a:pt x="5228444" y="1517016"/>
-                  </a:lnTo>
-                  <a:lnTo>
-                    <a:pt x="5300066" y="1444547"/>
-                  </a:lnTo>
-                  <a:lnTo>
-                    <a:pt x="5371689" y="1369618"/>
-                  </a:lnTo>
-                  <a:lnTo>
-                    <a:pt x="5443311" y="1292147"/>
-                  </a:lnTo>
-                  <a:lnTo>
-                    <a:pt x="5514934" y="1212046"/>
-                  </a:lnTo>
-                  <a:lnTo>
-                    <a:pt x="5586557" y="1129228"/>
-                  </a:lnTo>
-                  <a:lnTo>
-                    <a:pt x="5658179" y="1043599"/>
-                  </a:lnTo>
-                  <a:lnTo>
-                    <a:pt x="5729802" y="955065"/>
-                  </a:lnTo>
-                  <a:lnTo>
-                    <a:pt x="5801424" y="863526"/>
-                  </a:lnTo>
-                  <a:lnTo>
-                    <a:pt x="5873047" y="768881"/>
-                  </a:lnTo>
-                  <a:lnTo>
-                    <a:pt x="5944669" y="671025"/>
-                  </a:lnTo>
-                  <a:lnTo>
-                    <a:pt x="6016292" y="569848"/>
-                  </a:lnTo>
-                  <a:lnTo>
-                    <a:pt x="6087914" y="465237"/>
-                  </a:lnTo>
-                  <a:lnTo>
-                    <a:pt x="6159537" y="357077"/>
-                  </a:lnTo>
-                  <a:lnTo>
-                    <a:pt x="6231159" y="245246"/>
-                  </a:lnTo>
-                  <a:lnTo>
-                    <a:pt x="6302782" y="129621"/>
-                  </a:lnTo>
-                  <a:lnTo>
-                    <a:pt x="6374404" y="10072"/>
-                  </a:lnTo>
-                  <a:lnTo>
-                    <a:pt x="6380241" y="0"/>
+                    <a:pt x="71622" y="2074342"/>
+                  </a:lnTo>
+                  <a:lnTo>
+                    <a:pt x="143245" y="2095125"/>
+                  </a:lnTo>
+                  <a:lnTo>
+                    <a:pt x="214867" y="2115635"/>
+                  </a:lnTo>
+                  <a:lnTo>
+                    <a:pt x="286490" y="2135875"/>
+                  </a:lnTo>
+                  <a:lnTo>
+                    <a:pt x="358112" y="2155849"/>
+                  </a:lnTo>
+                  <a:lnTo>
+                    <a:pt x="429735" y="2175559"/>
+                  </a:lnTo>
+                  <a:lnTo>
+                    <a:pt x="501357" y="2195010"/>
+                  </a:lnTo>
+                  <a:lnTo>
+                    <a:pt x="572980" y="2214204"/>
+                  </a:lnTo>
+                  <a:lnTo>
+                    <a:pt x="644602" y="2233146"/>
+                  </a:lnTo>
+                  <a:lnTo>
+                    <a:pt x="716225" y="2251839"/>
+                  </a:lnTo>
+                  <a:lnTo>
+                    <a:pt x="787847" y="2270285"/>
+                  </a:lnTo>
+                  <a:lnTo>
+                    <a:pt x="859470" y="2288488"/>
+                  </a:lnTo>
+                  <a:lnTo>
+                    <a:pt x="931092" y="2306452"/>
+                  </a:lnTo>
+                  <a:lnTo>
+                    <a:pt x="1002715" y="2324179"/>
+                  </a:lnTo>
+                  <a:lnTo>
+                    <a:pt x="1074337" y="2341673"/>
+                  </a:lnTo>
+                  <a:lnTo>
+                    <a:pt x="1145960" y="2358936"/>
+                  </a:lnTo>
+                  <a:lnTo>
+                    <a:pt x="1217582" y="2375972"/>
+                  </a:lnTo>
+                  <a:lnTo>
+                    <a:pt x="1289205" y="2392784"/>
+                  </a:lnTo>
+                  <a:lnTo>
+                    <a:pt x="1360827" y="2409374"/>
+                  </a:lnTo>
+                  <a:lnTo>
+                    <a:pt x="1432450" y="2425746"/>
+                  </a:lnTo>
+                  <a:lnTo>
+                    <a:pt x="1504073" y="2441902"/>
+                  </a:lnTo>
+                  <a:lnTo>
+                    <a:pt x="1575695" y="2457846"/>
+                  </a:lnTo>
+                  <a:lnTo>
+                    <a:pt x="1647318" y="2473579"/>
+                  </a:lnTo>
+                  <a:lnTo>
+                    <a:pt x="1718940" y="2489105"/>
+                  </a:lnTo>
+                  <a:lnTo>
+                    <a:pt x="1790563" y="2504427"/>
+                  </a:lnTo>
+                  <a:lnTo>
+                    <a:pt x="1862185" y="2519547"/>
+                  </a:lnTo>
+                  <a:lnTo>
+                    <a:pt x="1933808" y="2534468"/>
+                  </a:lnTo>
+                  <a:lnTo>
+                    <a:pt x="2005430" y="2549193"/>
+                  </a:lnTo>
+                  <a:lnTo>
+                    <a:pt x="2077053" y="2563724"/>
+                  </a:lnTo>
+                  <a:lnTo>
+                    <a:pt x="2148675" y="2578063"/>
+                  </a:lnTo>
+                  <a:lnTo>
+                    <a:pt x="2220298" y="2592213"/>
+                  </a:lnTo>
+                  <a:lnTo>
+                    <a:pt x="2291920" y="2606177"/>
+                  </a:lnTo>
+                  <a:lnTo>
+                    <a:pt x="2363543" y="2619958"/>
+                  </a:lnTo>
+                  <a:lnTo>
+                    <a:pt x="2435165" y="2633556"/>
+                  </a:lnTo>
+                  <a:lnTo>
+                    <a:pt x="2506788" y="2646976"/>
+                  </a:lnTo>
+                  <a:lnTo>
+                    <a:pt x="2578410" y="2660219"/>
+                  </a:lnTo>
+                  <a:lnTo>
+                    <a:pt x="2650033" y="2673288"/>
+                  </a:lnTo>
+                  <a:lnTo>
+                    <a:pt x="2721655" y="2686184"/>
+                  </a:lnTo>
+                  <a:lnTo>
+                    <a:pt x="2793278" y="2698911"/>
+                  </a:lnTo>
+                  <a:lnTo>
+                    <a:pt x="2864901" y="2711470"/>
+                  </a:lnTo>
+                  <a:lnTo>
+                    <a:pt x="2936523" y="2723864"/>
+                  </a:lnTo>
+                  <a:lnTo>
+                    <a:pt x="3008146" y="2736094"/>
+                  </a:lnTo>
+                  <a:lnTo>
+                    <a:pt x="3079768" y="2748164"/>
+                  </a:lnTo>
+                  <a:lnTo>
+                    <a:pt x="3151391" y="2760074"/>
+                  </a:lnTo>
+                  <a:lnTo>
+                    <a:pt x="3223013" y="2771828"/>
+                  </a:lnTo>
+                  <a:lnTo>
+                    <a:pt x="3294636" y="2781802"/>
+                  </a:lnTo>
+                  <a:lnTo>
+                    <a:pt x="3366258" y="2752147"/>
+                  </a:lnTo>
+                  <a:lnTo>
+                    <a:pt x="3437881" y="2721483"/>
+                  </a:lnTo>
+                  <a:lnTo>
+                    <a:pt x="3509503" y="2689774"/>
+                  </a:lnTo>
+                  <a:lnTo>
+                    <a:pt x="3581126" y="2656985"/>
+                  </a:lnTo>
+                  <a:lnTo>
+                    <a:pt x="3652748" y="2623080"/>
+                  </a:lnTo>
+                  <a:lnTo>
+                    <a:pt x="3724371" y="2588020"/>
+                  </a:lnTo>
+                  <a:lnTo>
+                    <a:pt x="3795993" y="2551766"/>
+                  </a:lnTo>
+                  <a:lnTo>
+                    <a:pt x="3867616" y="2514278"/>
+                  </a:lnTo>
+                  <a:lnTo>
+                    <a:pt x="3939238" y="2475513"/>
+                  </a:lnTo>
+                  <a:lnTo>
+                    <a:pt x="4010861" y="2435429"/>
+                  </a:lnTo>
+                  <a:lnTo>
+                    <a:pt x="4082483" y="2393979"/>
+                  </a:lnTo>
+                  <a:lnTo>
+                    <a:pt x="4154106" y="2351117"/>
+                  </a:lnTo>
+                  <a:lnTo>
+                    <a:pt x="4225729" y="2306797"/>
+                  </a:lnTo>
+                  <a:lnTo>
+                    <a:pt x="4297351" y="2260966"/>
+                  </a:lnTo>
+                  <a:lnTo>
+                    <a:pt x="4368974" y="2213575"/>
+                  </a:lnTo>
+                  <a:lnTo>
+                    <a:pt x="4440596" y="2164571"/>
+                  </a:lnTo>
+                  <a:lnTo>
+                    <a:pt x="4512219" y="2113897"/>
+                  </a:lnTo>
+                  <a:lnTo>
+                    <a:pt x="4583841" y="2061498"/>
+                  </a:lnTo>
+                  <a:lnTo>
+                    <a:pt x="4655464" y="2007315"/>
+                  </a:lnTo>
+                  <a:lnTo>
+                    <a:pt x="4727086" y="1951287"/>
+                  </a:lnTo>
+                  <a:lnTo>
+                    <a:pt x="4798709" y="1893350"/>
+                  </a:lnTo>
+                  <a:lnTo>
+                    <a:pt x="4870331" y="1833441"/>
+                  </a:lnTo>
+                  <a:lnTo>
+                    <a:pt x="4941954" y="1771492"/>
+                  </a:lnTo>
+                  <a:lnTo>
+                    <a:pt x="5013576" y="1707433"/>
+                  </a:lnTo>
+                  <a:lnTo>
+                    <a:pt x="5085199" y="1641192"/>
+                  </a:lnTo>
+                  <a:lnTo>
+                    <a:pt x="5156821" y="1572696"/>
+                  </a:lnTo>
+                  <a:lnTo>
+                    <a:pt x="5228444" y="1501868"/>
+                  </a:lnTo>
+                  <a:lnTo>
+                    <a:pt x="5300066" y="1428628"/>
+                  </a:lnTo>
+                  <a:lnTo>
+                    <a:pt x="5371689" y="1352893"/>
+                  </a:lnTo>
+                  <a:lnTo>
+                    <a:pt x="5443311" y="1274580"/>
+                  </a:lnTo>
+                  <a:lnTo>
+                    <a:pt x="5514934" y="1193599"/>
+                  </a:lnTo>
+                  <a:lnTo>
+                    <a:pt x="5586557" y="1109861"/>
+                  </a:lnTo>
+                  <a:lnTo>
+                    <a:pt x="5658179" y="1023272"/>
+                  </a:lnTo>
+                  <a:lnTo>
+                    <a:pt x="5729802" y="933734"/>
+                  </a:lnTo>
+                  <a:lnTo>
+                    <a:pt x="5801424" y="841147"/>
+                  </a:lnTo>
+                  <a:lnTo>
+                    <a:pt x="5873047" y="745407"/>
+                  </a:lnTo>
+                  <a:lnTo>
+                    <a:pt x="5944669" y="646406"/>
+                  </a:lnTo>
+                  <a:lnTo>
+                    <a:pt x="6016292" y="544035"/>
+                  </a:lnTo>
+                  <a:lnTo>
+                    <a:pt x="6087914" y="438177"/>
+                  </a:lnTo>
+                  <a:lnTo>
+                    <a:pt x="6159537" y="328715"/>
+                  </a:lnTo>
+                  <a:lnTo>
+                    <a:pt x="6231159" y="215525"/>
+                  </a:lnTo>
+                  <a:lnTo>
+                    <a:pt x="6302782" y="98481"/>
+                  </a:lnTo>
+                  <a:lnTo>
+                    <a:pt x="6361060" y="0"/>
                   </a:lnTo>
                   <a:lnTo>
                     <a:pt x="7090630" y="0"/>
                   </a:lnTo>
                   <a:lnTo>
-                    <a:pt x="7090630" y="3216484"/>
-                  </a:lnTo>
-                  <a:lnTo>
-                    <a:pt x="7019007" y="3210759"/>
-                  </a:lnTo>
-                  <a:lnTo>
-                    <a:pt x="6947385" y="3204959"/>
-                  </a:lnTo>
-                  <a:lnTo>
-                    <a:pt x="6875762" y="3199083"/>
-                  </a:lnTo>
-                  <a:lnTo>
-                    <a:pt x="6804139" y="3193130"/>
-                  </a:lnTo>
-                  <a:lnTo>
-                    <a:pt x="6732517" y="3187098"/>
-                  </a:lnTo>
-                  <a:lnTo>
-                    <a:pt x="6660894" y="3180988"/>
-                  </a:lnTo>
-                  <a:lnTo>
-                    <a:pt x="6589272" y="3174797"/>
-                  </a:lnTo>
-                  <a:lnTo>
-                    <a:pt x="6517649" y="3168525"/>
-                  </a:lnTo>
-                  <a:lnTo>
-                    <a:pt x="6446027" y="3162171"/>
-                  </a:lnTo>
-                  <a:lnTo>
-                    <a:pt x="6374404" y="3155733"/>
-                  </a:lnTo>
-                  <a:lnTo>
-                    <a:pt x="6302782" y="3149210"/>
-                  </a:lnTo>
-                  <a:lnTo>
-                    <a:pt x="6231159" y="3142603"/>
-                  </a:lnTo>
-                  <a:lnTo>
-                    <a:pt x="6159537" y="3135908"/>
-                  </a:lnTo>
-                  <a:lnTo>
-                    <a:pt x="6087914" y="3129125"/>
-                  </a:lnTo>
-                  <a:lnTo>
-                    <a:pt x="6016292" y="3122254"/>
-                  </a:lnTo>
-                  <a:lnTo>
-                    <a:pt x="5944669" y="3115292"/>
-                  </a:lnTo>
-                  <a:lnTo>
-                    <a:pt x="5873047" y="3108239"/>
-                  </a:lnTo>
-                  <a:lnTo>
-                    <a:pt x="5801424" y="3101093"/>
-                  </a:lnTo>
-                  <a:lnTo>
-                    <a:pt x="5729802" y="3093854"/>
-                  </a:lnTo>
-                  <a:lnTo>
-                    <a:pt x="5658179" y="3086519"/>
-                  </a:lnTo>
-                  <a:lnTo>
-                    <a:pt x="5586557" y="3079089"/>
-                  </a:lnTo>
-                  <a:lnTo>
-                    <a:pt x="5514934" y="3071560"/>
-                  </a:lnTo>
-                  <a:lnTo>
-                    <a:pt x="5443311" y="3063933"/>
-                  </a:lnTo>
-                  <a:lnTo>
-                    <a:pt x="5371689" y="3056206"/>
-                  </a:lnTo>
-                  <a:lnTo>
-                    <a:pt x="5300066" y="3048377"/>
-                  </a:lnTo>
-                  <a:lnTo>
-                    <a:pt x="5228444" y="3040446"/>
-                  </a:lnTo>
-                  <a:lnTo>
-                    <a:pt x="5156821" y="3032410"/>
-                  </a:lnTo>
-                  <a:lnTo>
-                    <a:pt x="5085199" y="3024269"/>
-                  </a:lnTo>
-                  <a:lnTo>
-                    <a:pt x="5013576" y="3016021"/>
-                  </a:lnTo>
-                  <a:lnTo>
-                    <a:pt x="4941954" y="3007665"/>
-                  </a:lnTo>
-                  <a:lnTo>
-                    <a:pt x="4870331" y="2999200"/>
-                  </a:lnTo>
-                  <a:lnTo>
-                    <a:pt x="4798709" y="2990623"/>
-                  </a:lnTo>
-                  <a:lnTo>
-                    <a:pt x="4727086" y="2981933"/>
-                  </a:lnTo>
-                  <a:lnTo>
-                    <a:pt x="4655464" y="2973130"/>
-                  </a:lnTo>
-                  <a:lnTo>
-                    <a:pt x="4583841" y="2964211"/>
-                  </a:lnTo>
-                  <a:lnTo>
-                    <a:pt x="4512219" y="2955174"/>
-                  </a:lnTo>
-                  <a:lnTo>
-                    <a:pt x="4440596" y="2946020"/>
-                  </a:lnTo>
-                  <a:lnTo>
-                    <a:pt x="4368974" y="2936745"/>
-                  </a:lnTo>
-                  <a:lnTo>
-                    <a:pt x="4297351" y="2927348"/>
-                  </a:lnTo>
-                  <a:lnTo>
-                    <a:pt x="4225729" y="2917828"/>
-                  </a:lnTo>
-                  <a:lnTo>
-                    <a:pt x="4154106" y="2908183"/>
-                  </a:lnTo>
-                  <a:lnTo>
-                    <a:pt x="4082483" y="2898412"/>
-                  </a:lnTo>
-                  <a:lnTo>
-                    <a:pt x="4010861" y="2888512"/>
-                  </a:lnTo>
-                  <a:lnTo>
-                    <a:pt x="3939238" y="2878482"/>
-                  </a:lnTo>
-                  <a:lnTo>
-                    <a:pt x="3867616" y="2868321"/>
-                  </a:lnTo>
-                  <a:lnTo>
-                    <a:pt x="3795993" y="2858026"/>
-                  </a:lnTo>
-                  <a:lnTo>
-                    <a:pt x="3724371" y="2847596"/>
-                  </a:lnTo>
-                  <a:lnTo>
-                    <a:pt x="3652748" y="2837029"/>
-                  </a:lnTo>
-                  <a:lnTo>
-                    <a:pt x="3581126" y="2826324"/>
-                  </a:lnTo>
-                  <a:lnTo>
-                    <a:pt x="3509503" y="2815478"/>
-                  </a:lnTo>
-                  <a:lnTo>
-                    <a:pt x="3437881" y="2804489"/>
-                  </a:lnTo>
-                  <a:lnTo>
-                    <a:pt x="3366258" y="2793357"/>
-                  </a:lnTo>
-                  <a:lnTo>
-                    <a:pt x="3294636" y="2785236"/>
-                  </a:lnTo>
-                  <a:lnTo>
-                    <a:pt x="3223013" y="2813704"/>
-                  </a:lnTo>
-                  <a:lnTo>
-                    <a:pt x="3151391" y="2841238"/>
-                  </a:lnTo>
-                  <a:lnTo>
-                    <a:pt x="3079768" y="2867868"/>
-                  </a:lnTo>
-                  <a:lnTo>
-                    <a:pt x="3008146" y="2893624"/>
-                  </a:lnTo>
-                  <a:lnTo>
-                    <a:pt x="2936523" y="2918535"/>
-                  </a:lnTo>
-                  <a:lnTo>
-                    <a:pt x="2864901" y="2942629"/>
-                  </a:lnTo>
-                  <a:lnTo>
-                    <a:pt x="2793278" y="2965931"/>
-                  </a:lnTo>
-                  <a:lnTo>
-                    <a:pt x="2721655" y="2988469"/>
-                  </a:lnTo>
-                  <a:lnTo>
-                    <a:pt x="2650033" y="3010267"/>
-                  </a:lnTo>
-                  <a:lnTo>
-                    <a:pt x="2578410" y="3031350"/>
-                  </a:lnTo>
-                  <a:lnTo>
-                    <a:pt x="2506788" y="3051741"/>
-                  </a:lnTo>
-                  <a:lnTo>
-                    <a:pt x="2435165" y="3071462"/>
-                  </a:lnTo>
-                  <a:lnTo>
-                    <a:pt x="2363543" y="3090537"/>
-                  </a:lnTo>
-                  <a:lnTo>
-                    <a:pt x="2291920" y="3108985"/>
-                  </a:lnTo>
-                  <a:lnTo>
-                    <a:pt x="2220298" y="3126828"/>
-                  </a:lnTo>
-                  <a:lnTo>
-                    <a:pt x="2148675" y="3144085"/>
-                  </a:lnTo>
-                  <a:lnTo>
-                    <a:pt x="2077053" y="3160776"/>
-                  </a:lnTo>
-                  <a:lnTo>
-                    <a:pt x="2005430" y="3176919"/>
-                  </a:lnTo>
-                  <a:lnTo>
-                    <a:pt x="1933808" y="3192532"/>
-                  </a:lnTo>
-                  <a:lnTo>
-                    <a:pt x="1862185" y="3207633"/>
-                  </a:lnTo>
-                  <a:lnTo>
-                    <a:pt x="1790563" y="3222238"/>
-                  </a:lnTo>
-                  <a:lnTo>
-                    <a:pt x="1718940" y="3236364"/>
-                  </a:lnTo>
-                  <a:lnTo>
-                    <a:pt x="1647318" y="3250026"/>
-                  </a:lnTo>
-                  <a:lnTo>
-                    <a:pt x="1575695" y="3263240"/>
-                  </a:lnTo>
-                  <a:lnTo>
-                    <a:pt x="1504073" y="3276021"/>
-                  </a:lnTo>
-                  <a:lnTo>
-                    <a:pt x="1432450" y="3288381"/>
-                  </a:lnTo>
-                  <a:lnTo>
-                    <a:pt x="1360827" y="3300336"/>
-                  </a:lnTo>
-                  <a:lnTo>
-                    <a:pt x="1289205" y="3311899"/>
-                  </a:lnTo>
-                  <a:lnTo>
-                    <a:pt x="1217582" y="3323082"/>
-                  </a:lnTo>
-                  <a:lnTo>
-                    <a:pt x="1145960" y="3333898"/>
-                  </a:lnTo>
-                  <a:lnTo>
-                    <a:pt x="1074337" y="3344360"/>
-                  </a:lnTo>
-                  <a:lnTo>
-                    <a:pt x="1002715" y="3354477"/>
-                  </a:lnTo>
-                  <a:lnTo>
-                    <a:pt x="931092" y="3364263"/>
-                  </a:lnTo>
-                  <a:lnTo>
-                    <a:pt x="859470" y="3373728"/>
-                  </a:lnTo>
-                  <a:lnTo>
-                    <a:pt x="787847" y="3382882"/>
-                  </a:lnTo>
-                  <a:lnTo>
-                    <a:pt x="716225" y="3391735"/>
-                  </a:lnTo>
-                  <a:lnTo>
-                    <a:pt x="644602" y="3400298"/>
-                  </a:lnTo>
-                  <a:lnTo>
-                    <a:pt x="572980" y="3408580"/>
-                  </a:lnTo>
-                  <a:lnTo>
-                    <a:pt x="501357" y="3416590"/>
-                  </a:lnTo>
-                  <a:lnTo>
-                    <a:pt x="429735" y="3424338"/>
-                  </a:lnTo>
-                  <a:lnTo>
-                    <a:pt x="358112" y="3431831"/>
-                  </a:lnTo>
-                  <a:lnTo>
-                    <a:pt x="286490" y="3439078"/>
-                  </a:lnTo>
-                  <a:lnTo>
-                    <a:pt x="214867" y="3446087"/>
-                  </a:lnTo>
-                  <a:lnTo>
-                    <a:pt x="143245" y="3452866"/>
-                  </a:lnTo>
-                  <a:lnTo>
-                    <a:pt x="71622" y="3459423"/>
-                  </a:lnTo>
-                  <a:lnTo>
-                    <a:pt x="0" y="3465764"/>
+                    <a:pt x="7090630" y="3222106"/>
+                  </a:lnTo>
+                  <a:lnTo>
+                    <a:pt x="7019007" y="3216361"/>
+                  </a:lnTo>
+                  <a:lnTo>
+                    <a:pt x="6947385" y="3210539"/>
+                  </a:lnTo>
+                  <a:lnTo>
+                    <a:pt x="6875762" y="3204640"/>
+                  </a:lnTo>
+                  <a:lnTo>
+                    <a:pt x="6804139" y="3198662"/>
+                  </a:lnTo>
+                  <a:lnTo>
+                    <a:pt x="6732517" y="3192604"/>
+                  </a:lnTo>
+                  <a:lnTo>
+                    <a:pt x="6660894" y="3186465"/>
+                  </a:lnTo>
+                  <a:lnTo>
+                    <a:pt x="6589272" y="3180244"/>
+                  </a:lnTo>
+                  <a:lnTo>
+                    <a:pt x="6517649" y="3173940"/>
+                  </a:lnTo>
+                  <a:lnTo>
+                    <a:pt x="6446027" y="3167552"/>
+                  </a:lnTo>
+                  <a:lnTo>
+                    <a:pt x="6374404" y="3161079"/>
+                  </a:lnTo>
+                  <a:lnTo>
+                    <a:pt x="6302782" y="3154520"/>
+                  </a:lnTo>
+                  <a:lnTo>
+                    <a:pt x="6231159" y="3147873"/>
+                  </a:lnTo>
+                  <a:lnTo>
+                    <a:pt x="6159537" y="3141137"/>
+                  </a:lnTo>
+                  <a:lnTo>
+                    <a:pt x="6087914" y="3134312"/>
+                  </a:lnTo>
+                  <a:lnTo>
+                    <a:pt x="6016292" y="3127395"/>
+                  </a:lnTo>
+                  <a:lnTo>
+                    <a:pt x="5944669" y="3120386"/>
+                  </a:lnTo>
+                  <a:lnTo>
+                    <a:pt x="5873047" y="3113284"/>
+                  </a:lnTo>
+                  <a:lnTo>
+                    <a:pt x="5801424" y="3106086"/>
+                  </a:lnTo>
+                  <a:lnTo>
+                    <a:pt x="5729802" y="3098793"/>
+                  </a:lnTo>
+                  <a:lnTo>
+                    <a:pt x="5658179" y="3091402"/>
+                  </a:lnTo>
+                  <a:lnTo>
+                    <a:pt x="5586557" y="3083913"/>
+                  </a:lnTo>
+                  <a:lnTo>
+                    <a:pt x="5514934" y="3076324"/>
+                  </a:lnTo>
+                  <a:lnTo>
+                    <a:pt x="5443311" y="3068634"/>
+                  </a:lnTo>
+                  <a:lnTo>
+                    <a:pt x="5371689" y="3060840"/>
+                  </a:lnTo>
+                  <a:lnTo>
+                    <a:pt x="5300066" y="3052943"/>
+                  </a:lnTo>
+                  <a:lnTo>
+                    <a:pt x="5228444" y="3044941"/>
+                  </a:lnTo>
+                  <a:lnTo>
+                    <a:pt x="5156821" y="3036832"/>
+                  </a:lnTo>
+                  <a:lnTo>
+                    <a:pt x="5085199" y="3028614"/>
+                  </a:lnTo>
+                  <a:lnTo>
+                    <a:pt x="5013576" y="3020287"/>
+                  </a:lnTo>
+                  <a:lnTo>
+                    <a:pt x="4941954" y="3011849"/>
+                  </a:lnTo>
+                  <a:lnTo>
+                    <a:pt x="4870331" y="3003298"/>
+                  </a:lnTo>
+                  <a:lnTo>
+                    <a:pt x="4798709" y="2994633"/>
+                  </a:lnTo>
+                  <a:lnTo>
+                    <a:pt x="4727086" y="2985853"/>
+                  </a:lnTo>
+                  <a:lnTo>
+                    <a:pt x="4655464" y="2976955"/>
+                  </a:lnTo>
+                  <a:lnTo>
+                    <a:pt x="4583841" y="2967939"/>
+                  </a:lnTo>
+                  <a:lnTo>
+                    <a:pt x="4512219" y="2958802"/>
+                  </a:lnTo>
+                  <a:lnTo>
+                    <a:pt x="4440596" y="2949543"/>
+                  </a:lnTo>
+                  <a:lnTo>
+                    <a:pt x="4368974" y="2940161"/>
+                  </a:lnTo>
+                  <a:lnTo>
+                    <a:pt x="4297351" y="2930654"/>
+                  </a:lnTo>
+                  <a:lnTo>
+                    <a:pt x="4225729" y="2921019"/>
+                  </a:lnTo>
+                  <a:lnTo>
+                    <a:pt x="4154106" y="2911256"/>
+                  </a:lnTo>
+                  <a:lnTo>
+                    <a:pt x="4082483" y="2901363"/>
+                  </a:lnTo>
+                  <a:lnTo>
+                    <a:pt x="4010861" y="2891338"/>
+                  </a:lnTo>
+                  <a:lnTo>
+                    <a:pt x="3939238" y="2881179"/>
+                  </a:lnTo>
+                  <a:lnTo>
+                    <a:pt x="3867616" y="2870885"/>
+                  </a:lnTo>
+                  <a:lnTo>
+                    <a:pt x="3795993" y="2860453"/>
+                  </a:lnTo>
+                  <a:lnTo>
+                    <a:pt x="3724371" y="2849882"/>
+                  </a:lnTo>
+                  <a:lnTo>
+                    <a:pt x="3652748" y="2839170"/>
+                  </a:lnTo>
+                  <a:lnTo>
+                    <a:pt x="3581126" y="2828315"/>
+                  </a:lnTo>
+                  <a:lnTo>
+                    <a:pt x="3509503" y="2817315"/>
+                  </a:lnTo>
+                  <a:lnTo>
+                    <a:pt x="3437881" y="2806168"/>
+                  </a:lnTo>
+                  <a:lnTo>
+                    <a:pt x="3366258" y="2794873"/>
+                  </a:lnTo>
+                  <a:lnTo>
+                    <a:pt x="3294636" y="2783427"/>
+                  </a:lnTo>
+                  <a:lnTo>
+                    <a:pt x="3223013" y="2810480"/>
+                  </a:lnTo>
+                  <a:lnTo>
+                    <a:pt x="3151391" y="2838214"/>
+                  </a:lnTo>
+                  <a:lnTo>
+                    <a:pt x="3079768" y="2865034"/>
+                  </a:lnTo>
+                  <a:lnTo>
+                    <a:pt x="3008146" y="2890972"/>
+                  </a:lnTo>
+                  <a:lnTo>
+                    <a:pt x="2936523" y="2916055"/>
+                  </a:lnTo>
+                  <a:lnTo>
+                    <a:pt x="2864901" y="2940312"/>
+                  </a:lnTo>
+                  <a:lnTo>
+                    <a:pt x="2793278" y="2963770"/>
+                  </a:lnTo>
+                  <a:lnTo>
+                    <a:pt x="2721655" y="2986456"/>
+                  </a:lnTo>
+                  <a:lnTo>
+                    <a:pt x="2650033" y="3008394"/>
+                  </a:lnTo>
+                  <a:lnTo>
+                    <a:pt x="2578410" y="3029611"/>
+                  </a:lnTo>
+                  <a:lnTo>
+                    <a:pt x="2506788" y="3050128"/>
+                  </a:lnTo>
+                  <a:lnTo>
+                    <a:pt x="2435165" y="3069970"/>
+                  </a:lnTo>
+                  <a:lnTo>
+                    <a:pt x="2363543" y="3089158"/>
+                  </a:lnTo>
+                  <a:lnTo>
+                    <a:pt x="2291920" y="3107715"/>
+                  </a:lnTo>
+                  <a:lnTo>
+                    <a:pt x="2220298" y="3125660"/>
+                  </a:lnTo>
+                  <a:lnTo>
+                    <a:pt x="2148675" y="3143015"/>
+                  </a:lnTo>
+                  <a:lnTo>
+                    <a:pt x="2077053" y="3159797"/>
+                  </a:lnTo>
+                  <a:lnTo>
+                    <a:pt x="2005430" y="3176028"/>
+                  </a:lnTo>
+                  <a:lnTo>
+                    <a:pt x="1933808" y="3191723"/>
+                  </a:lnTo>
+                  <a:lnTo>
+                    <a:pt x="1862185" y="3206902"/>
+                  </a:lnTo>
+                  <a:lnTo>
+                    <a:pt x="1790563" y="3221581"/>
+                  </a:lnTo>
+                  <a:lnTo>
+                    <a:pt x="1718940" y="3235777"/>
+                  </a:lnTo>
+                  <a:lnTo>
+                    <a:pt x="1647318" y="3249505"/>
+                  </a:lnTo>
+                  <a:lnTo>
+                    <a:pt x="1575695" y="3262781"/>
+                  </a:lnTo>
+                  <a:lnTo>
+                    <a:pt x="1504073" y="3275620"/>
+                  </a:lnTo>
+                  <a:lnTo>
+                    <a:pt x="1432450" y="3288036"/>
+                  </a:lnTo>
+                  <a:lnTo>
+                    <a:pt x="1360827" y="3300043"/>
+                  </a:lnTo>
+                  <a:lnTo>
+                    <a:pt x="1289205" y="3311654"/>
+                  </a:lnTo>
+                  <a:lnTo>
+                    <a:pt x="1217582" y="3322884"/>
+                  </a:lnTo>
+                  <a:lnTo>
+                    <a:pt x="1145960" y="3333743"/>
+                  </a:lnTo>
+                  <a:lnTo>
+                    <a:pt x="1074337" y="3344245"/>
+                  </a:lnTo>
+                  <a:lnTo>
+                    <a:pt x="1002715" y="3354401"/>
+                  </a:lnTo>
+                  <a:lnTo>
+                    <a:pt x="931092" y="3364223"/>
+                  </a:lnTo>
+                  <a:lnTo>
+                    <a:pt x="859470" y="3373721"/>
+                  </a:lnTo>
+                  <a:lnTo>
+                    <a:pt x="787847" y="3382906"/>
+                  </a:lnTo>
+                  <a:lnTo>
+                    <a:pt x="716225" y="3391789"/>
+                  </a:lnTo>
+                  <a:lnTo>
+                    <a:pt x="644602" y="3400380"/>
+                  </a:lnTo>
+                  <a:lnTo>
+                    <a:pt x="572980" y="3408687"/>
+                  </a:lnTo>
+                  <a:lnTo>
+                    <a:pt x="501357" y="3416721"/>
+                  </a:lnTo>
+                  <a:lnTo>
+                    <a:pt x="429735" y="3424490"/>
+                  </a:lnTo>
+                  <a:lnTo>
+                    <a:pt x="358112" y="3432004"/>
+                  </a:lnTo>
+                  <a:lnTo>
+                    <a:pt x="286490" y="3439270"/>
+                  </a:lnTo>
+                  <a:lnTo>
+                    <a:pt x="214867" y="3446296"/>
+                  </a:lnTo>
+                  <a:lnTo>
+                    <a:pt x="143245" y="3453092"/>
+                  </a:lnTo>
+                  <a:lnTo>
+                    <a:pt x="71622" y="3459663"/>
+                  </a:lnTo>
+                  <a:lnTo>
+                    <a:pt x="0" y="3466018"/>
                   </a:lnTo>
                   <a:close/>
                 </a:path>
@@ -3567,284 +3564,281 @@
           <p:spPr>
             <a:xfrm>
               <a:off x="1172049" y="1896563"/>
-              <a:ext cx="6380241" cy="2782078"/>
+              <a:ext cx="6361060" cy="2781802"/>
             </a:xfrm>
             <a:custGeom>
               <a:avLst/>
               <a:pathLst>
-                <a:path w="6380241" h="2782078">
+                <a:path w="6361060" h="2781802">
                   <a:moveTo>
-                    <a:pt x="0" y="2066601"/>
+                    <a:pt x="0" y="2053281"/>
                   </a:moveTo>
                   <a:lnTo>
-                    <a:pt x="71622" y="2087150"/>
-                  </a:lnTo>
-                  <a:lnTo>
-                    <a:pt x="143245" y="2107432"/>
-                  </a:lnTo>
-                  <a:lnTo>
-                    <a:pt x="214867" y="2127451"/>
-                  </a:lnTo>
-                  <a:lnTo>
-                    <a:pt x="286490" y="2147211"/>
-                  </a:lnTo>
-                  <a:lnTo>
-                    <a:pt x="358112" y="2166714"/>
-                  </a:lnTo>
-                  <a:lnTo>
-                    <a:pt x="429735" y="2185966"/>
-                  </a:lnTo>
-                  <a:lnTo>
-                    <a:pt x="501357" y="2204967"/>
-                  </a:lnTo>
-                  <a:lnTo>
-                    <a:pt x="572980" y="2223723"/>
-                  </a:lnTo>
-                  <a:lnTo>
-                    <a:pt x="644602" y="2242236"/>
-                  </a:lnTo>
-                  <a:lnTo>
-                    <a:pt x="716225" y="2260508"/>
-                  </a:lnTo>
-                  <a:lnTo>
-                    <a:pt x="787847" y="2278544"/>
-                  </a:lnTo>
-                  <a:lnTo>
-                    <a:pt x="859470" y="2296347"/>
-                  </a:lnTo>
-                  <a:lnTo>
-                    <a:pt x="931092" y="2313918"/>
-                  </a:lnTo>
-                  <a:lnTo>
-                    <a:pt x="1002715" y="2331262"/>
-                  </a:lnTo>
-                  <a:lnTo>
-                    <a:pt x="1074337" y="2348382"/>
-                  </a:lnTo>
-                  <a:lnTo>
-                    <a:pt x="1145960" y="2365279"/>
-                  </a:lnTo>
-                  <a:lnTo>
-                    <a:pt x="1217582" y="2381958"/>
-                  </a:lnTo>
-                  <a:lnTo>
-                    <a:pt x="1289205" y="2398420"/>
-                  </a:lnTo>
-                  <a:lnTo>
-                    <a:pt x="1360827" y="2414670"/>
-                  </a:lnTo>
-                  <a:lnTo>
-                    <a:pt x="1432450" y="2430708"/>
-                  </a:lnTo>
-                  <a:lnTo>
-                    <a:pt x="1504073" y="2446539"/>
-                  </a:lnTo>
-                  <a:lnTo>
-                    <a:pt x="1575695" y="2462165"/>
-                  </a:lnTo>
-                  <a:lnTo>
-                    <a:pt x="1647318" y="2477589"/>
-                  </a:lnTo>
-                  <a:lnTo>
-                    <a:pt x="1718940" y="2492812"/>
-                  </a:lnTo>
-                  <a:lnTo>
-                    <a:pt x="1790563" y="2507839"/>
-                  </a:lnTo>
-                  <a:lnTo>
-                    <a:pt x="1862185" y="2522670"/>
-                  </a:lnTo>
-                  <a:lnTo>
-                    <a:pt x="1933808" y="2537310"/>
-                  </a:lnTo>
-                  <a:lnTo>
-                    <a:pt x="2005430" y="2551760"/>
-                  </a:lnTo>
-                  <a:lnTo>
-                    <a:pt x="2077053" y="2566022"/>
-                  </a:lnTo>
-                  <a:lnTo>
-                    <a:pt x="2148675" y="2580100"/>
-                  </a:lnTo>
-                  <a:lnTo>
-                    <a:pt x="2220298" y="2593996"/>
-                  </a:lnTo>
-                  <a:lnTo>
-                    <a:pt x="2291920" y="2607711"/>
-                  </a:lnTo>
-                  <a:lnTo>
-                    <a:pt x="2363543" y="2621249"/>
-                  </a:lnTo>
-                  <a:lnTo>
-                    <a:pt x="2435165" y="2634611"/>
-                  </a:lnTo>
-                  <a:lnTo>
-                    <a:pt x="2506788" y="2647801"/>
-                  </a:lnTo>
-                  <a:lnTo>
-                    <a:pt x="2578410" y="2660819"/>
-                  </a:lnTo>
-                  <a:lnTo>
-                    <a:pt x="2650033" y="2673669"/>
-                  </a:lnTo>
-                  <a:lnTo>
-                    <a:pt x="2721655" y="2686352"/>
-                  </a:lnTo>
-                  <a:lnTo>
-                    <a:pt x="2793278" y="2698871"/>
-                  </a:lnTo>
-                  <a:lnTo>
-                    <a:pt x="2864901" y="2711228"/>
-                  </a:lnTo>
-                  <a:lnTo>
-                    <a:pt x="2936523" y="2723424"/>
-                  </a:lnTo>
-                  <a:lnTo>
-                    <a:pt x="3008146" y="2735463"/>
-                  </a:lnTo>
-                  <a:lnTo>
-                    <a:pt x="3079768" y="2747346"/>
-                  </a:lnTo>
-                  <a:lnTo>
-                    <a:pt x="3151391" y="2759074"/>
-                  </a:lnTo>
-                  <a:lnTo>
-                    <a:pt x="3223013" y="2770651"/>
-                  </a:lnTo>
-                  <a:lnTo>
-                    <a:pt x="3294636" y="2782078"/>
-                  </a:lnTo>
-                  <a:lnTo>
-                    <a:pt x="3366258" y="2755801"/>
-                  </a:lnTo>
-                  <a:lnTo>
-                    <a:pt x="3437881" y="2725368"/>
-                  </a:lnTo>
-                  <a:lnTo>
-                    <a:pt x="3509503" y="2693902"/>
-                  </a:lnTo>
-                  <a:lnTo>
-                    <a:pt x="3581126" y="2661369"/>
-                  </a:lnTo>
-                  <a:lnTo>
-                    <a:pt x="3652748" y="2627731"/>
-                  </a:lnTo>
-                  <a:lnTo>
-                    <a:pt x="3724371" y="2592952"/>
-                  </a:lnTo>
-                  <a:lnTo>
-                    <a:pt x="3795993" y="2556993"/>
-                  </a:lnTo>
-                  <a:lnTo>
-                    <a:pt x="3867616" y="2519813"/>
-                  </a:lnTo>
-                  <a:lnTo>
-                    <a:pt x="3939238" y="2481372"/>
-                  </a:lnTo>
-                  <a:lnTo>
-                    <a:pt x="4010861" y="2441627"/>
-                  </a:lnTo>
-                  <a:lnTo>
-                    <a:pt x="4082483" y="2400533"/>
-                  </a:lnTo>
-                  <a:lnTo>
-                    <a:pt x="4154106" y="2358044"/>
-                  </a:lnTo>
-                  <a:lnTo>
-                    <a:pt x="4225729" y="2314114"/>
-                  </a:lnTo>
-                  <a:lnTo>
-                    <a:pt x="4297351" y="2268692"/>
-                  </a:lnTo>
-                  <a:lnTo>
-                    <a:pt x="4368974" y="2221730"/>
-                  </a:lnTo>
-                  <a:lnTo>
-                    <a:pt x="4440596" y="2173174"/>
-                  </a:lnTo>
-                  <a:lnTo>
-                    <a:pt x="4512219" y="2122970"/>
-                  </a:lnTo>
-                  <a:lnTo>
-                    <a:pt x="4583841" y="2071063"/>
-                  </a:lnTo>
-                  <a:lnTo>
-                    <a:pt x="4655464" y="2017394"/>
-                  </a:lnTo>
-                  <a:lnTo>
-                    <a:pt x="4727086" y="1961904"/>
-                  </a:lnTo>
-                  <a:lnTo>
-                    <a:pt x="4798709" y="1904531"/>
-                  </a:lnTo>
-                  <a:lnTo>
-                    <a:pt x="4870331" y="1845211"/>
-                  </a:lnTo>
-                  <a:lnTo>
-                    <a:pt x="4941954" y="1783878"/>
-                  </a:lnTo>
-                  <a:lnTo>
-                    <a:pt x="5013576" y="1720464"/>
-                  </a:lnTo>
-                  <a:lnTo>
-                    <a:pt x="5085199" y="1654898"/>
-                  </a:lnTo>
-                  <a:lnTo>
-                    <a:pt x="5156821" y="1587108"/>
-                  </a:lnTo>
-                  <a:lnTo>
-                    <a:pt x="5228444" y="1517016"/>
-                  </a:lnTo>
-                  <a:lnTo>
-                    <a:pt x="5300066" y="1444547"/>
-                  </a:lnTo>
-                  <a:lnTo>
-                    <a:pt x="5371689" y="1369618"/>
-                  </a:lnTo>
-                  <a:lnTo>
-                    <a:pt x="5443311" y="1292147"/>
-                  </a:lnTo>
-                  <a:lnTo>
-                    <a:pt x="5514934" y="1212046"/>
-                  </a:lnTo>
-                  <a:lnTo>
-                    <a:pt x="5586557" y="1129228"/>
-                  </a:lnTo>
-                  <a:lnTo>
-                    <a:pt x="5658179" y="1043599"/>
-                  </a:lnTo>
-                  <a:lnTo>
-                    <a:pt x="5729802" y="955065"/>
-                  </a:lnTo>
-                  <a:lnTo>
-                    <a:pt x="5801424" y="863526"/>
-                  </a:lnTo>
-                  <a:lnTo>
-                    <a:pt x="5873047" y="768881"/>
-                  </a:lnTo>
-                  <a:lnTo>
-                    <a:pt x="5944669" y="671025"/>
-                  </a:lnTo>
-                  <a:lnTo>
-                    <a:pt x="6016292" y="569848"/>
-                  </a:lnTo>
-                  <a:lnTo>
-                    <a:pt x="6087914" y="465237"/>
-                  </a:lnTo>
-                  <a:lnTo>
-                    <a:pt x="6159537" y="357077"/>
-                  </a:lnTo>
-                  <a:lnTo>
-                    <a:pt x="6231159" y="245246"/>
-                  </a:lnTo>
-                  <a:lnTo>
-                    <a:pt x="6302782" y="129621"/>
-                  </a:lnTo>
-                  <a:lnTo>
-                    <a:pt x="6374404" y="10072"/>
-                  </a:lnTo>
-                  <a:lnTo>
-                    <a:pt x="6380241" y="0"/>
+                    <a:pt x="71622" y="2074342"/>
+                  </a:lnTo>
+                  <a:lnTo>
+                    <a:pt x="143245" y="2095125"/>
+                  </a:lnTo>
+                  <a:lnTo>
+                    <a:pt x="214867" y="2115635"/>
+                  </a:lnTo>
+                  <a:lnTo>
+                    <a:pt x="286490" y="2135875"/>
+                  </a:lnTo>
+                  <a:lnTo>
+                    <a:pt x="358112" y="2155849"/>
+                  </a:lnTo>
+                  <a:lnTo>
+                    <a:pt x="429735" y="2175559"/>
+                  </a:lnTo>
+                  <a:lnTo>
+                    <a:pt x="501357" y="2195010"/>
+                  </a:lnTo>
+                  <a:lnTo>
+                    <a:pt x="572980" y="2214204"/>
+                  </a:lnTo>
+                  <a:lnTo>
+                    <a:pt x="644602" y="2233146"/>
+                  </a:lnTo>
+                  <a:lnTo>
+                    <a:pt x="716225" y="2251839"/>
+                  </a:lnTo>
+                  <a:lnTo>
+                    <a:pt x="787847" y="2270285"/>
+                  </a:lnTo>
+                  <a:lnTo>
+                    <a:pt x="859470" y="2288488"/>
+                  </a:lnTo>
+                  <a:lnTo>
+                    <a:pt x="931092" y="2306452"/>
+                  </a:lnTo>
+                  <a:lnTo>
+                    <a:pt x="1002715" y="2324179"/>
+                  </a:lnTo>
+                  <a:lnTo>
+                    <a:pt x="1074337" y="2341673"/>
+                  </a:lnTo>
+                  <a:lnTo>
+                    <a:pt x="1145960" y="2358936"/>
+                  </a:lnTo>
+                  <a:lnTo>
+                    <a:pt x="1217582" y="2375972"/>
+                  </a:lnTo>
+                  <a:lnTo>
+                    <a:pt x="1289205" y="2392784"/>
+                  </a:lnTo>
+                  <a:lnTo>
+                    <a:pt x="1360827" y="2409374"/>
+                  </a:lnTo>
+                  <a:lnTo>
+                    <a:pt x="1432450" y="2425746"/>
+                  </a:lnTo>
+                  <a:lnTo>
+                    <a:pt x="1504073" y="2441902"/>
+                  </a:lnTo>
+                  <a:lnTo>
+                    <a:pt x="1575695" y="2457846"/>
+                  </a:lnTo>
+                  <a:lnTo>
+                    <a:pt x="1647318" y="2473579"/>
+                  </a:lnTo>
+                  <a:lnTo>
+                    <a:pt x="1718940" y="2489105"/>
+                  </a:lnTo>
+                  <a:lnTo>
+                    <a:pt x="1790563" y="2504427"/>
+                  </a:lnTo>
+                  <a:lnTo>
+                    <a:pt x="1862185" y="2519547"/>
+                  </a:lnTo>
+                  <a:lnTo>
+                    <a:pt x="1933808" y="2534468"/>
+                  </a:lnTo>
+                  <a:lnTo>
+                    <a:pt x="2005430" y="2549193"/>
+                  </a:lnTo>
+                  <a:lnTo>
+                    <a:pt x="2077053" y="2563724"/>
+                  </a:lnTo>
+                  <a:lnTo>
+                    <a:pt x="2148675" y="2578063"/>
+                  </a:lnTo>
+                  <a:lnTo>
+                    <a:pt x="2220298" y="2592213"/>
+                  </a:lnTo>
+                  <a:lnTo>
+                    <a:pt x="2291920" y="2606177"/>
+                  </a:lnTo>
+                  <a:lnTo>
+                    <a:pt x="2363543" y="2619958"/>
+                  </a:lnTo>
+                  <a:lnTo>
+                    <a:pt x="2435165" y="2633556"/>
+                  </a:lnTo>
+                  <a:lnTo>
+                    <a:pt x="2506788" y="2646976"/>
+                  </a:lnTo>
+                  <a:lnTo>
+                    <a:pt x="2578410" y="2660219"/>
+                  </a:lnTo>
+                  <a:lnTo>
+                    <a:pt x="2650033" y="2673288"/>
+                  </a:lnTo>
+                  <a:lnTo>
+                    <a:pt x="2721655" y="2686184"/>
+                  </a:lnTo>
+                  <a:lnTo>
+                    <a:pt x="2793278" y="2698911"/>
+                  </a:lnTo>
+                  <a:lnTo>
+                    <a:pt x="2864901" y="2711470"/>
+                  </a:lnTo>
+                  <a:lnTo>
+                    <a:pt x="2936523" y="2723864"/>
+                  </a:lnTo>
+                  <a:lnTo>
+                    <a:pt x="3008146" y="2736094"/>
+                  </a:lnTo>
+                  <a:lnTo>
+                    <a:pt x="3079768" y="2748164"/>
+                  </a:lnTo>
+                  <a:lnTo>
+                    <a:pt x="3151391" y="2760074"/>
+                  </a:lnTo>
+                  <a:lnTo>
+                    <a:pt x="3223013" y="2771828"/>
+                  </a:lnTo>
+                  <a:lnTo>
+                    <a:pt x="3294636" y="2781802"/>
+                  </a:lnTo>
+                  <a:lnTo>
+                    <a:pt x="3366258" y="2752147"/>
+                  </a:lnTo>
+                  <a:lnTo>
+                    <a:pt x="3437881" y="2721483"/>
+                  </a:lnTo>
+                  <a:lnTo>
+                    <a:pt x="3509503" y="2689774"/>
+                  </a:lnTo>
+                  <a:lnTo>
+                    <a:pt x="3581126" y="2656985"/>
+                  </a:lnTo>
+                  <a:lnTo>
+                    <a:pt x="3652748" y="2623080"/>
+                  </a:lnTo>
+                  <a:lnTo>
+                    <a:pt x="3724371" y="2588020"/>
+                  </a:lnTo>
+                  <a:lnTo>
+                    <a:pt x="3795993" y="2551766"/>
+                  </a:lnTo>
+                  <a:lnTo>
+                    <a:pt x="3867616" y="2514278"/>
+                  </a:lnTo>
+                  <a:lnTo>
+                    <a:pt x="3939238" y="2475513"/>
+                  </a:lnTo>
+                  <a:lnTo>
+                    <a:pt x="4010861" y="2435429"/>
+                  </a:lnTo>
+                  <a:lnTo>
+                    <a:pt x="4082483" y="2393979"/>
+                  </a:lnTo>
+                  <a:lnTo>
+                    <a:pt x="4154106" y="2351117"/>
+                  </a:lnTo>
+                  <a:lnTo>
+                    <a:pt x="4225729" y="2306797"/>
+                  </a:lnTo>
+                  <a:lnTo>
+                    <a:pt x="4297351" y="2260966"/>
+                  </a:lnTo>
+                  <a:lnTo>
+                    <a:pt x="4368974" y="2213575"/>
+                  </a:lnTo>
+                  <a:lnTo>
+                    <a:pt x="4440596" y="2164571"/>
+                  </a:lnTo>
+                  <a:lnTo>
+                    <a:pt x="4512219" y="2113897"/>
+                  </a:lnTo>
+                  <a:lnTo>
+                    <a:pt x="4583841" y="2061498"/>
+                  </a:lnTo>
+                  <a:lnTo>
+                    <a:pt x="4655464" y="2007315"/>
+                  </a:lnTo>
+                  <a:lnTo>
+                    <a:pt x="4727086" y="1951287"/>
+                  </a:lnTo>
+                  <a:lnTo>
+                    <a:pt x="4798709" y="1893350"/>
+                  </a:lnTo>
+                  <a:lnTo>
+                    <a:pt x="4870331" y="1833441"/>
+                  </a:lnTo>
+                  <a:lnTo>
+                    <a:pt x="4941954" y="1771492"/>
+                  </a:lnTo>
+                  <a:lnTo>
+                    <a:pt x="5013576" y="1707433"/>
+                  </a:lnTo>
+                  <a:lnTo>
+                    <a:pt x="5085199" y="1641192"/>
+                  </a:lnTo>
+                  <a:lnTo>
+                    <a:pt x="5156821" y="1572696"/>
+                  </a:lnTo>
+                  <a:lnTo>
+                    <a:pt x="5228444" y="1501868"/>
+                  </a:lnTo>
+                  <a:lnTo>
+                    <a:pt x="5300066" y="1428628"/>
+                  </a:lnTo>
+                  <a:lnTo>
+                    <a:pt x="5371689" y="1352893"/>
+                  </a:lnTo>
+                  <a:lnTo>
+                    <a:pt x="5443311" y="1274580"/>
+                  </a:lnTo>
+                  <a:lnTo>
+                    <a:pt x="5514934" y="1193599"/>
+                  </a:lnTo>
+                  <a:lnTo>
+                    <a:pt x="5586557" y="1109861"/>
+                  </a:lnTo>
+                  <a:lnTo>
+                    <a:pt x="5658179" y="1023272"/>
+                  </a:lnTo>
+                  <a:lnTo>
+                    <a:pt x="5729802" y="933734"/>
+                  </a:lnTo>
+                  <a:lnTo>
+                    <a:pt x="5801424" y="841147"/>
+                  </a:lnTo>
+                  <a:lnTo>
+                    <a:pt x="5873047" y="745407"/>
+                  </a:lnTo>
+                  <a:lnTo>
+                    <a:pt x="5944669" y="646406"/>
+                  </a:lnTo>
+                  <a:lnTo>
+                    <a:pt x="6016292" y="544035"/>
+                  </a:lnTo>
+                  <a:lnTo>
+                    <a:pt x="6087914" y="438177"/>
+                  </a:lnTo>
+                  <a:lnTo>
+                    <a:pt x="6159537" y="328715"/>
+                  </a:lnTo>
+                  <a:lnTo>
+                    <a:pt x="6231159" y="215525"/>
+                  </a:lnTo>
+                  <a:lnTo>
+                    <a:pt x="6302782" y="98481"/>
+                  </a:lnTo>
+                  <a:lnTo>
+                    <a:pt x="6361060" y="0"/>
                   </a:lnTo>
                 </a:path>
               </a:pathLst>
@@ -3864,312 +3858,312 @@
           </p:nvSpPr>
           <p:spPr>
             <a:xfrm>
-              <a:off x="1172049" y="4681799"/>
-              <a:ext cx="7090630" cy="680528"/>
+              <a:off x="1172049" y="4679990"/>
+              <a:ext cx="7090630" cy="682591"/>
             </a:xfrm>
             <a:custGeom>
               <a:avLst/>
               <a:pathLst>
-                <a:path w="7090630" h="680528">
+                <a:path w="7090630" h="682591">
                   <a:moveTo>
-                    <a:pt x="7090630" y="431248"/>
+                    <a:pt x="7090630" y="438679"/>
                   </a:moveTo>
                   <a:lnTo>
-                    <a:pt x="7019007" y="425523"/>
-                  </a:lnTo>
-                  <a:lnTo>
-                    <a:pt x="6947385" y="419723"/>
-                  </a:lnTo>
-                  <a:lnTo>
-                    <a:pt x="6875762" y="413847"/>
-                  </a:lnTo>
-                  <a:lnTo>
-                    <a:pt x="6804139" y="407894"/>
-                  </a:lnTo>
-                  <a:lnTo>
-                    <a:pt x="6732517" y="401862"/>
-                  </a:lnTo>
-                  <a:lnTo>
-                    <a:pt x="6660894" y="395752"/>
-                  </a:lnTo>
-                  <a:lnTo>
-                    <a:pt x="6589272" y="389561"/>
-                  </a:lnTo>
-                  <a:lnTo>
-                    <a:pt x="6517649" y="383289"/>
-                  </a:lnTo>
-                  <a:lnTo>
-                    <a:pt x="6446027" y="376935"/>
-                  </a:lnTo>
-                  <a:lnTo>
-                    <a:pt x="6374404" y="370497"/>
-                  </a:lnTo>
-                  <a:lnTo>
-                    <a:pt x="6302782" y="363974"/>
-                  </a:lnTo>
-                  <a:lnTo>
-                    <a:pt x="6231159" y="357367"/>
-                  </a:lnTo>
-                  <a:lnTo>
-                    <a:pt x="6159537" y="350672"/>
-                  </a:lnTo>
-                  <a:lnTo>
-                    <a:pt x="6087914" y="343889"/>
-                  </a:lnTo>
-                  <a:lnTo>
-                    <a:pt x="6016292" y="337018"/>
-                  </a:lnTo>
-                  <a:lnTo>
-                    <a:pt x="5944669" y="330056"/>
-                  </a:lnTo>
-                  <a:lnTo>
-                    <a:pt x="5873047" y="323003"/>
-                  </a:lnTo>
-                  <a:lnTo>
-                    <a:pt x="5801424" y="315857"/>
-                  </a:lnTo>
-                  <a:lnTo>
-                    <a:pt x="5729802" y="308618"/>
-                  </a:lnTo>
-                  <a:lnTo>
-                    <a:pt x="5658179" y="301283"/>
-                  </a:lnTo>
-                  <a:lnTo>
-                    <a:pt x="5586557" y="293853"/>
-                  </a:lnTo>
-                  <a:lnTo>
-                    <a:pt x="5514934" y="286324"/>
-                  </a:lnTo>
-                  <a:lnTo>
-                    <a:pt x="5443311" y="278697"/>
-                  </a:lnTo>
-                  <a:lnTo>
-                    <a:pt x="5371689" y="270970"/>
-                  </a:lnTo>
-                  <a:lnTo>
-                    <a:pt x="5300066" y="263141"/>
-                  </a:lnTo>
-                  <a:lnTo>
-                    <a:pt x="5228444" y="255210"/>
-                  </a:lnTo>
-                  <a:lnTo>
-                    <a:pt x="5156821" y="247174"/>
-                  </a:lnTo>
-                  <a:lnTo>
-                    <a:pt x="5085199" y="239033"/>
-                  </a:lnTo>
-                  <a:lnTo>
-                    <a:pt x="5013576" y="230785"/>
-                  </a:lnTo>
-                  <a:lnTo>
-                    <a:pt x="4941954" y="222429"/>
-                  </a:lnTo>
-                  <a:lnTo>
-                    <a:pt x="4870331" y="213964"/>
-                  </a:lnTo>
-                  <a:lnTo>
-                    <a:pt x="4798709" y="205387"/>
-                  </a:lnTo>
-                  <a:lnTo>
-                    <a:pt x="4727086" y="196697"/>
-                  </a:lnTo>
-                  <a:lnTo>
-                    <a:pt x="4655464" y="187894"/>
-                  </a:lnTo>
-                  <a:lnTo>
-                    <a:pt x="4583841" y="178975"/>
-                  </a:lnTo>
-                  <a:lnTo>
-                    <a:pt x="4512219" y="169938"/>
-                  </a:lnTo>
-                  <a:lnTo>
-                    <a:pt x="4440596" y="160784"/>
-                  </a:lnTo>
-                  <a:lnTo>
-                    <a:pt x="4368974" y="151509"/>
-                  </a:lnTo>
-                  <a:lnTo>
-                    <a:pt x="4297351" y="142112"/>
-                  </a:lnTo>
-                  <a:lnTo>
-                    <a:pt x="4225729" y="132592"/>
-                  </a:lnTo>
-                  <a:lnTo>
-                    <a:pt x="4154106" y="122947"/>
-                  </a:lnTo>
-                  <a:lnTo>
-                    <a:pt x="4082483" y="113176"/>
-                  </a:lnTo>
-                  <a:lnTo>
-                    <a:pt x="4010861" y="103276"/>
-                  </a:lnTo>
-                  <a:lnTo>
-                    <a:pt x="3939238" y="93246"/>
-                  </a:lnTo>
-                  <a:lnTo>
-                    <a:pt x="3867616" y="83085"/>
-                  </a:lnTo>
-                  <a:lnTo>
-                    <a:pt x="3795993" y="72790"/>
-                  </a:lnTo>
-                  <a:lnTo>
-                    <a:pt x="3724371" y="62360"/>
-                  </a:lnTo>
-                  <a:lnTo>
-                    <a:pt x="3652748" y="51793"/>
-                  </a:lnTo>
-                  <a:lnTo>
-                    <a:pt x="3581126" y="41088"/>
-                  </a:lnTo>
-                  <a:lnTo>
-                    <a:pt x="3509503" y="30242"/>
-                  </a:lnTo>
-                  <a:lnTo>
-                    <a:pt x="3437881" y="19253"/>
-                  </a:lnTo>
-                  <a:lnTo>
-                    <a:pt x="3366258" y="8121"/>
+                    <a:pt x="7019007" y="432934"/>
+                  </a:lnTo>
+                  <a:lnTo>
+                    <a:pt x="6947385" y="427112"/>
+                  </a:lnTo>
+                  <a:lnTo>
+                    <a:pt x="6875762" y="421213"/>
+                  </a:lnTo>
+                  <a:lnTo>
+                    <a:pt x="6804139" y="415234"/>
+                  </a:lnTo>
+                  <a:lnTo>
+                    <a:pt x="6732517" y="409176"/>
+                  </a:lnTo>
+                  <a:lnTo>
+                    <a:pt x="6660894" y="403038"/>
+                  </a:lnTo>
+                  <a:lnTo>
+                    <a:pt x="6589272" y="396817"/>
+                  </a:lnTo>
+                  <a:lnTo>
+                    <a:pt x="6517649" y="390513"/>
+                  </a:lnTo>
+                  <a:lnTo>
+                    <a:pt x="6446027" y="384125"/>
+                  </a:lnTo>
+                  <a:lnTo>
+                    <a:pt x="6374404" y="377652"/>
+                  </a:lnTo>
+                  <a:lnTo>
+                    <a:pt x="6302782" y="371093"/>
+                  </a:lnTo>
+                  <a:lnTo>
+                    <a:pt x="6231159" y="364446"/>
+                  </a:lnTo>
+                  <a:lnTo>
+                    <a:pt x="6159537" y="357710"/>
+                  </a:lnTo>
+                  <a:lnTo>
+                    <a:pt x="6087914" y="350885"/>
+                  </a:lnTo>
+                  <a:lnTo>
+                    <a:pt x="6016292" y="343968"/>
+                  </a:lnTo>
+                  <a:lnTo>
+                    <a:pt x="5944669" y="336959"/>
+                  </a:lnTo>
+                  <a:lnTo>
+                    <a:pt x="5873047" y="329856"/>
+                  </a:lnTo>
+                  <a:lnTo>
+                    <a:pt x="5801424" y="322659"/>
+                  </a:lnTo>
+                  <a:lnTo>
+                    <a:pt x="5729802" y="315366"/>
+                  </a:lnTo>
+                  <a:lnTo>
+                    <a:pt x="5658179" y="307975"/>
+                  </a:lnTo>
+                  <a:lnTo>
+                    <a:pt x="5586557" y="300486"/>
+                  </a:lnTo>
+                  <a:lnTo>
+                    <a:pt x="5514934" y="292897"/>
+                  </a:lnTo>
+                  <a:lnTo>
+                    <a:pt x="5443311" y="285206"/>
+                  </a:lnTo>
+                  <a:lnTo>
+                    <a:pt x="5371689" y="277413"/>
+                  </a:lnTo>
+                  <a:lnTo>
+                    <a:pt x="5300066" y="269516"/>
+                  </a:lnTo>
+                  <a:lnTo>
+                    <a:pt x="5228444" y="261514"/>
+                  </a:lnTo>
+                  <a:lnTo>
+                    <a:pt x="5156821" y="253405"/>
+                  </a:lnTo>
+                  <a:lnTo>
+                    <a:pt x="5085199" y="245187"/>
+                  </a:lnTo>
+                  <a:lnTo>
+                    <a:pt x="5013576" y="236860"/>
+                  </a:lnTo>
+                  <a:lnTo>
+                    <a:pt x="4941954" y="228422"/>
+                  </a:lnTo>
+                  <a:lnTo>
+                    <a:pt x="4870331" y="219871"/>
+                  </a:lnTo>
+                  <a:lnTo>
+                    <a:pt x="4798709" y="211206"/>
+                  </a:lnTo>
+                  <a:lnTo>
+                    <a:pt x="4727086" y="202426"/>
+                  </a:lnTo>
+                  <a:lnTo>
+                    <a:pt x="4655464" y="193528"/>
+                  </a:lnTo>
+                  <a:lnTo>
+                    <a:pt x="4583841" y="184512"/>
+                  </a:lnTo>
+                  <a:lnTo>
+                    <a:pt x="4512219" y="175375"/>
+                  </a:lnTo>
+                  <a:lnTo>
+                    <a:pt x="4440596" y="166116"/>
+                  </a:lnTo>
+                  <a:lnTo>
+                    <a:pt x="4368974" y="156734"/>
+                  </a:lnTo>
+                  <a:lnTo>
+                    <a:pt x="4297351" y="147226"/>
+                  </a:lnTo>
+                  <a:lnTo>
+                    <a:pt x="4225729" y="137592"/>
+                  </a:lnTo>
+                  <a:lnTo>
+                    <a:pt x="4154106" y="127829"/>
+                  </a:lnTo>
+                  <a:lnTo>
+                    <a:pt x="4082483" y="117936"/>
+                  </a:lnTo>
+                  <a:lnTo>
+                    <a:pt x="4010861" y="107911"/>
+                  </a:lnTo>
+                  <a:lnTo>
+                    <a:pt x="3939238" y="97752"/>
+                  </a:lnTo>
+                  <a:lnTo>
+                    <a:pt x="3867616" y="87458"/>
+                  </a:lnTo>
+                  <a:lnTo>
+                    <a:pt x="3795993" y="77026"/>
+                  </a:lnTo>
+                  <a:lnTo>
+                    <a:pt x="3724371" y="66455"/>
+                  </a:lnTo>
+                  <a:lnTo>
+                    <a:pt x="3652748" y="55743"/>
+                  </a:lnTo>
+                  <a:lnTo>
+                    <a:pt x="3581126" y="44888"/>
+                  </a:lnTo>
+                  <a:lnTo>
+                    <a:pt x="3509503" y="33888"/>
+                  </a:lnTo>
+                  <a:lnTo>
+                    <a:pt x="3437881" y="22741"/>
+                  </a:lnTo>
+                  <a:lnTo>
+                    <a:pt x="3366258" y="11446"/>
                   </a:lnTo>
                   <a:lnTo>
                     <a:pt x="3294636" y="0"/>
                   </a:lnTo>
                   <a:lnTo>
-                    <a:pt x="3223013" y="28468"/>
-                  </a:lnTo>
-                  <a:lnTo>
-                    <a:pt x="3151391" y="56002"/>
-                  </a:lnTo>
-                  <a:lnTo>
-                    <a:pt x="3079768" y="82632"/>
-                  </a:lnTo>
-                  <a:lnTo>
-                    <a:pt x="3008146" y="108388"/>
-                  </a:lnTo>
-                  <a:lnTo>
-                    <a:pt x="2936523" y="133299"/>
-                  </a:lnTo>
-                  <a:lnTo>
-                    <a:pt x="2864901" y="157393"/>
-                  </a:lnTo>
-                  <a:lnTo>
-                    <a:pt x="2793278" y="180695"/>
-                  </a:lnTo>
-                  <a:lnTo>
-                    <a:pt x="2721655" y="203233"/>
-                  </a:lnTo>
-                  <a:lnTo>
-                    <a:pt x="2650033" y="225031"/>
-                  </a:lnTo>
-                  <a:lnTo>
-                    <a:pt x="2578410" y="246114"/>
-                  </a:lnTo>
-                  <a:lnTo>
-                    <a:pt x="2506788" y="266505"/>
-                  </a:lnTo>
-                  <a:lnTo>
-                    <a:pt x="2435165" y="286226"/>
-                  </a:lnTo>
-                  <a:lnTo>
-                    <a:pt x="2363543" y="305301"/>
-                  </a:lnTo>
-                  <a:lnTo>
-                    <a:pt x="2291920" y="323749"/>
-                  </a:lnTo>
-                  <a:lnTo>
-                    <a:pt x="2220298" y="341592"/>
-                  </a:lnTo>
-                  <a:lnTo>
-                    <a:pt x="2148675" y="358849"/>
-                  </a:lnTo>
-                  <a:lnTo>
-                    <a:pt x="2077053" y="375540"/>
-                  </a:lnTo>
-                  <a:lnTo>
-                    <a:pt x="2005430" y="391683"/>
-                  </a:lnTo>
-                  <a:lnTo>
-                    <a:pt x="1933808" y="407296"/>
-                  </a:lnTo>
-                  <a:lnTo>
-                    <a:pt x="1862185" y="422397"/>
-                  </a:lnTo>
-                  <a:lnTo>
-                    <a:pt x="1790563" y="437002"/>
-                  </a:lnTo>
-                  <a:lnTo>
-                    <a:pt x="1718940" y="451128"/>
-                  </a:lnTo>
-                  <a:lnTo>
-                    <a:pt x="1647318" y="464790"/>
-                  </a:lnTo>
-                  <a:lnTo>
-                    <a:pt x="1575695" y="478004"/>
-                  </a:lnTo>
-                  <a:lnTo>
-                    <a:pt x="1504073" y="490785"/>
-                  </a:lnTo>
-                  <a:lnTo>
-                    <a:pt x="1432450" y="503145"/>
-                  </a:lnTo>
-                  <a:lnTo>
-                    <a:pt x="1360827" y="515100"/>
-                  </a:lnTo>
-                  <a:lnTo>
-                    <a:pt x="1289205" y="526663"/>
-                  </a:lnTo>
-                  <a:lnTo>
-                    <a:pt x="1217582" y="537846"/>
-                  </a:lnTo>
-                  <a:lnTo>
-                    <a:pt x="1145960" y="548662"/>
-                  </a:lnTo>
-                  <a:lnTo>
-                    <a:pt x="1074337" y="559124"/>
-                  </a:lnTo>
-                  <a:lnTo>
-                    <a:pt x="1002715" y="569241"/>
-                  </a:lnTo>
-                  <a:lnTo>
-                    <a:pt x="931092" y="579027"/>
-                  </a:lnTo>
-                  <a:lnTo>
-                    <a:pt x="859470" y="588492"/>
-                  </a:lnTo>
-                  <a:lnTo>
-                    <a:pt x="787847" y="597646"/>
-                  </a:lnTo>
-                  <a:lnTo>
-                    <a:pt x="716225" y="606499"/>
-                  </a:lnTo>
-                  <a:lnTo>
-                    <a:pt x="644602" y="615062"/>
-                  </a:lnTo>
-                  <a:lnTo>
-                    <a:pt x="572980" y="623344"/>
-                  </a:lnTo>
-                  <a:lnTo>
-                    <a:pt x="501357" y="631354"/>
-                  </a:lnTo>
-                  <a:lnTo>
-                    <a:pt x="429735" y="639102"/>
-                  </a:lnTo>
-                  <a:lnTo>
-                    <a:pt x="358112" y="646595"/>
-                  </a:lnTo>
-                  <a:lnTo>
-                    <a:pt x="286490" y="653842"/>
-                  </a:lnTo>
-                  <a:lnTo>
-                    <a:pt x="214867" y="660851"/>
-                  </a:lnTo>
-                  <a:lnTo>
-                    <a:pt x="143245" y="667630"/>
-                  </a:lnTo>
-                  <a:lnTo>
-                    <a:pt x="71622" y="674187"/>
-                  </a:lnTo>
-                  <a:lnTo>
-                    <a:pt x="0" y="680528"/>
+                    <a:pt x="3223013" y="27053"/>
+                  </a:lnTo>
+                  <a:lnTo>
+                    <a:pt x="3151391" y="54787"/>
+                  </a:lnTo>
+                  <a:lnTo>
+                    <a:pt x="3079768" y="81607"/>
+                  </a:lnTo>
+                  <a:lnTo>
+                    <a:pt x="3008146" y="107545"/>
+                  </a:lnTo>
+                  <a:lnTo>
+                    <a:pt x="2936523" y="132628"/>
+                  </a:lnTo>
+                  <a:lnTo>
+                    <a:pt x="2864901" y="156885"/>
+                  </a:lnTo>
+                  <a:lnTo>
+                    <a:pt x="2793278" y="180343"/>
+                  </a:lnTo>
+                  <a:lnTo>
+                    <a:pt x="2721655" y="203029"/>
+                  </a:lnTo>
+                  <a:lnTo>
+                    <a:pt x="2650033" y="224967"/>
+                  </a:lnTo>
+                  <a:lnTo>
+                    <a:pt x="2578410" y="246183"/>
+                  </a:lnTo>
+                  <a:lnTo>
+                    <a:pt x="2506788" y="266701"/>
+                  </a:lnTo>
+                  <a:lnTo>
+                    <a:pt x="2435165" y="286543"/>
+                  </a:lnTo>
+                  <a:lnTo>
+                    <a:pt x="2363543" y="305731"/>
+                  </a:lnTo>
+                  <a:lnTo>
+                    <a:pt x="2291920" y="324288"/>
+                  </a:lnTo>
+                  <a:lnTo>
+                    <a:pt x="2220298" y="342233"/>
+                  </a:lnTo>
+                  <a:lnTo>
+                    <a:pt x="2148675" y="359587"/>
+                  </a:lnTo>
+                  <a:lnTo>
+                    <a:pt x="2077053" y="376370"/>
+                  </a:lnTo>
+                  <a:lnTo>
+                    <a:pt x="2005430" y="392600"/>
+                  </a:lnTo>
+                  <a:lnTo>
+                    <a:pt x="1933808" y="408296"/>
+                  </a:lnTo>
+                  <a:lnTo>
+                    <a:pt x="1862185" y="423475"/>
+                  </a:lnTo>
+                  <a:lnTo>
+                    <a:pt x="1790563" y="438154"/>
+                  </a:lnTo>
+                  <a:lnTo>
+                    <a:pt x="1718940" y="452350"/>
+                  </a:lnTo>
+                  <a:lnTo>
+                    <a:pt x="1647318" y="466078"/>
+                  </a:lnTo>
+                  <a:lnTo>
+                    <a:pt x="1575695" y="479354"/>
+                  </a:lnTo>
+                  <a:lnTo>
+                    <a:pt x="1504073" y="492192"/>
+                  </a:lnTo>
+                  <a:lnTo>
+                    <a:pt x="1432450" y="504608"/>
+                  </a:lnTo>
+                  <a:lnTo>
+                    <a:pt x="1360827" y="516616"/>
+                  </a:lnTo>
+                  <a:lnTo>
+                    <a:pt x="1289205" y="528227"/>
+                  </a:lnTo>
+                  <a:lnTo>
+                    <a:pt x="1217582" y="539457"/>
+                  </a:lnTo>
+                  <a:lnTo>
+                    <a:pt x="1145960" y="550316"/>
+                  </a:lnTo>
+                  <a:lnTo>
+                    <a:pt x="1074337" y="560818"/>
+                  </a:lnTo>
+                  <a:lnTo>
+                    <a:pt x="1002715" y="570974"/>
+                  </a:lnTo>
+                  <a:lnTo>
+                    <a:pt x="931092" y="580796"/>
+                  </a:lnTo>
+                  <a:lnTo>
+                    <a:pt x="859470" y="590294"/>
+                  </a:lnTo>
+                  <a:lnTo>
+                    <a:pt x="787847" y="599479"/>
+                  </a:lnTo>
+                  <a:lnTo>
+                    <a:pt x="716225" y="608362"/>
+                  </a:lnTo>
+                  <a:lnTo>
+                    <a:pt x="644602" y="616952"/>
+                  </a:lnTo>
+                  <a:lnTo>
+                    <a:pt x="572980" y="625260"/>
+                  </a:lnTo>
+                  <a:lnTo>
+                    <a:pt x="501357" y="633294"/>
+                  </a:lnTo>
+                  <a:lnTo>
+                    <a:pt x="429735" y="641063"/>
+                  </a:lnTo>
+                  <a:lnTo>
+                    <a:pt x="358112" y="648577"/>
+                  </a:lnTo>
+                  <a:lnTo>
+                    <a:pt x="286490" y="655843"/>
+                  </a:lnTo>
+                  <a:lnTo>
+                    <a:pt x="214867" y="662869"/>
+                  </a:lnTo>
+                  <a:lnTo>
+                    <a:pt x="143245" y="669665"/>
+                  </a:lnTo>
+                  <a:lnTo>
+                    <a:pt x="71622" y="676236"/>
+                  </a:lnTo>
+                  <a:lnTo>
+                    <a:pt x="0" y="682591"/>
                   </a:lnTo>
                 </a:path>
               </a:pathLst>
@@ -4189,309 +4183,309 @@
           </p:nvSpPr>
           <p:spPr>
             <a:xfrm>
-              <a:off x="1172049" y="4059880"/>
-              <a:ext cx="7090630" cy="944901"/>
+              <a:off x="1172049" y="4062041"/>
+              <a:ext cx="7090630" cy="940832"/>
             </a:xfrm>
             <a:custGeom>
               <a:avLst/>
               <a:pathLst>
-                <a:path w="7090630" h="944901">
+                <a:path w="7090630" h="940832">
                   <a:moveTo>
-                    <a:pt x="0" y="944901"/>
+                    <a:pt x="0" y="940832"/>
                   </a:moveTo>
                   <a:lnTo>
-                    <a:pt x="71622" y="939339"/>
-                  </a:lnTo>
-                  <a:lnTo>
-                    <a:pt x="143245" y="933720"/>
-                  </a:lnTo>
-                  <a:lnTo>
-                    <a:pt x="214867" y="928043"/>
-                  </a:lnTo>
-                  <a:lnTo>
-                    <a:pt x="286490" y="922309"/>
-                  </a:lnTo>
-                  <a:lnTo>
-                    <a:pt x="358112" y="916515"/>
-                  </a:lnTo>
-                  <a:lnTo>
-                    <a:pt x="429735" y="910663"/>
-                  </a:lnTo>
-                  <a:lnTo>
-                    <a:pt x="501357" y="904751"/>
-                  </a:lnTo>
-                  <a:lnTo>
-                    <a:pt x="572980" y="898778"/>
-                  </a:lnTo>
-                  <a:lnTo>
-                    <a:pt x="644602" y="892744"/>
-                  </a:lnTo>
-                  <a:lnTo>
-                    <a:pt x="716225" y="886649"/>
-                  </a:lnTo>
-                  <a:lnTo>
-                    <a:pt x="787847" y="880492"/>
-                  </a:lnTo>
-                  <a:lnTo>
-                    <a:pt x="859470" y="874271"/>
-                  </a:lnTo>
-                  <a:lnTo>
-                    <a:pt x="931092" y="867987"/>
-                  </a:lnTo>
-                  <a:lnTo>
-                    <a:pt x="1002715" y="861639"/>
-                  </a:lnTo>
-                  <a:lnTo>
-                    <a:pt x="1074337" y="855226"/>
-                  </a:lnTo>
-                  <a:lnTo>
-                    <a:pt x="1145960" y="848747"/>
-                  </a:lnTo>
-                  <a:lnTo>
-                    <a:pt x="1217582" y="842203"/>
-                  </a:lnTo>
-                  <a:lnTo>
-                    <a:pt x="1289205" y="835591"/>
-                  </a:lnTo>
-                  <a:lnTo>
-                    <a:pt x="1360827" y="828912"/>
-                  </a:lnTo>
-                  <a:lnTo>
-                    <a:pt x="1432450" y="822164"/>
-                  </a:lnTo>
-                  <a:lnTo>
-                    <a:pt x="1504073" y="815348"/>
-                  </a:lnTo>
-                  <a:lnTo>
-                    <a:pt x="1575695" y="808462"/>
-                  </a:lnTo>
-                  <a:lnTo>
-                    <a:pt x="1647318" y="801505"/>
-                  </a:lnTo>
-                  <a:lnTo>
-                    <a:pt x="1718940" y="794478"/>
-                  </a:lnTo>
-                  <a:lnTo>
-                    <a:pt x="1790563" y="787379"/>
-                  </a:lnTo>
-                  <a:lnTo>
-                    <a:pt x="1862185" y="780207"/>
-                  </a:lnTo>
-                  <a:lnTo>
-                    <a:pt x="1933808" y="772962"/>
-                  </a:lnTo>
-                  <a:lnTo>
-                    <a:pt x="2005430" y="765643"/>
-                  </a:lnTo>
-                  <a:lnTo>
-                    <a:pt x="2077053" y="758249"/>
-                  </a:lnTo>
-                  <a:lnTo>
-                    <a:pt x="2148675" y="750780"/>
-                  </a:lnTo>
-                  <a:lnTo>
-                    <a:pt x="2220298" y="743234"/>
-                  </a:lnTo>
-                  <a:lnTo>
-                    <a:pt x="2291920" y="735611"/>
-                  </a:lnTo>
-                  <a:lnTo>
-                    <a:pt x="2363543" y="727910"/>
-                  </a:lnTo>
-                  <a:lnTo>
-                    <a:pt x="2435165" y="720131"/>
-                  </a:lnTo>
-                  <a:lnTo>
-                    <a:pt x="2506788" y="712272"/>
-                  </a:lnTo>
-                  <a:lnTo>
-                    <a:pt x="2578410" y="704333"/>
-                  </a:lnTo>
-                  <a:lnTo>
-                    <a:pt x="2650033" y="696313"/>
-                  </a:lnTo>
-                  <a:lnTo>
-                    <a:pt x="2721655" y="688210"/>
-                  </a:lnTo>
-                  <a:lnTo>
-                    <a:pt x="2793278" y="680025"/>
-                  </a:lnTo>
-                  <a:lnTo>
-                    <a:pt x="2864901" y="671757"/>
-                  </a:lnTo>
-                  <a:lnTo>
-                    <a:pt x="2936523" y="663404"/>
-                  </a:lnTo>
-                  <a:lnTo>
-                    <a:pt x="3008146" y="654965"/>
-                  </a:lnTo>
-                  <a:lnTo>
-                    <a:pt x="3079768" y="646441"/>
-                  </a:lnTo>
-                  <a:lnTo>
-                    <a:pt x="3151391" y="637829"/>
-                  </a:lnTo>
-                  <a:lnTo>
-                    <a:pt x="3223013" y="629129"/>
-                  </a:lnTo>
-                  <a:lnTo>
-                    <a:pt x="3294636" y="620341"/>
-                  </a:lnTo>
-                  <a:lnTo>
-                    <a:pt x="3366258" y="611462"/>
-                  </a:lnTo>
-                  <a:lnTo>
-                    <a:pt x="3437881" y="602493"/>
-                  </a:lnTo>
-                  <a:lnTo>
-                    <a:pt x="3509503" y="593432"/>
-                  </a:lnTo>
-                  <a:lnTo>
-                    <a:pt x="3581126" y="584279"/>
-                  </a:lnTo>
-                  <a:lnTo>
-                    <a:pt x="3652748" y="575032"/>
-                  </a:lnTo>
-                  <a:lnTo>
-                    <a:pt x="3724371" y="565691"/>
-                  </a:lnTo>
-                  <a:lnTo>
-                    <a:pt x="3795993" y="556254"/>
-                  </a:lnTo>
-                  <a:lnTo>
-                    <a:pt x="3867616" y="546721"/>
-                  </a:lnTo>
-                  <a:lnTo>
-                    <a:pt x="3939238" y="537090"/>
-                  </a:lnTo>
-                  <a:lnTo>
-                    <a:pt x="4010861" y="527361"/>
-                  </a:lnTo>
-                  <a:lnTo>
-                    <a:pt x="4082483" y="517533"/>
-                  </a:lnTo>
-                  <a:lnTo>
-                    <a:pt x="4154106" y="507604"/>
-                  </a:lnTo>
-                  <a:lnTo>
-                    <a:pt x="4225729" y="497574"/>
-                  </a:lnTo>
-                  <a:lnTo>
-                    <a:pt x="4297351" y="487441"/>
-                  </a:lnTo>
-                  <a:lnTo>
-                    <a:pt x="4368974" y="477205"/>
-                  </a:lnTo>
-                  <a:lnTo>
-                    <a:pt x="4440596" y="466864"/>
-                  </a:lnTo>
-                  <a:lnTo>
-                    <a:pt x="4512219" y="456417"/>
-                  </a:lnTo>
-                  <a:lnTo>
-                    <a:pt x="4583841" y="445864"/>
-                  </a:lnTo>
-                  <a:lnTo>
-                    <a:pt x="4655464" y="435203"/>
-                  </a:lnTo>
-                  <a:lnTo>
-                    <a:pt x="4727086" y="424433"/>
-                  </a:lnTo>
-                  <a:lnTo>
-                    <a:pt x="4798709" y="413553"/>
-                  </a:lnTo>
-                  <a:lnTo>
-                    <a:pt x="4870331" y="402562"/>
-                  </a:lnTo>
-                  <a:lnTo>
-                    <a:pt x="4941954" y="391459"/>
-                  </a:lnTo>
-                  <a:lnTo>
-                    <a:pt x="5013576" y="380242"/>
-                  </a:lnTo>
-                  <a:lnTo>
-                    <a:pt x="5085199" y="368910"/>
-                  </a:lnTo>
-                  <a:lnTo>
-                    <a:pt x="5156821" y="357463"/>
-                  </a:lnTo>
-                  <a:lnTo>
-                    <a:pt x="5228444" y="345899"/>
-                  </a:lnTo>
-                  <a:lnTo>
-                    <a:pt x="5300066" y="334216"/>
-                  </a:lnTo>
-                  <a:lnTo>
-                    <a:pt x="5371689" y="322415"/>
-                  </a:lnTo>
-                  <a:lnTo>
-                    <a:pt x="5443311" y="310492"/>
-                  </a:lnTo>
-                  <a:lnTo>
-                    <a:pt x="5514934" y="298448"/>
-                  </a:lnTo>
-                  <a:lnTo>
-                    <a:pt x="5586557" y="286281"/>
-                  </a:lnTo>
-                  <a:lnTo>
-                    <a:pt x="5658179" y="273989"/>
-                  </a:lnTo>
-                  <a:lnTo>
-                    <a:pt x="5729802" y="261572"/>
-                  </a:lnTo>
-                  <a:lnTo>
-                    <a:pt x="5801424" y="249028"/>
-                  </a:lnTo>
-                  <a:lnTo>
-                    <a:pt x="5873047" y="236356"/>
-                  </a:lnTo>
-                  <a:lnTo>
-                    <a:pt x="5944669" y="223555"/>
-                  </a:lnTo>
-                  <a:lnTo>
-                    <a:pt x="6016292" y="210622"/>
-                  </a:lnTo>
-                  <a:lnTo>
-                    <a:pt x="6087914" y="197558"/>
-                  </a:lnTo>
-                  <a:lnTo>
-                    <a:pt x="6159537" y="184360"/>
-                  </a:lnTo>
-                  <a:lnTo>
-                    <a:pt x="6231159" y="171027"/>
-                  </a:lnTo>
-                  <a:lnTo>
-                    <a:pt x="6302782" y="157558"/>
-                  </a:lnTo>
-                  <a:lnTo>
-                    <a:pt x="6374404" y="143951"/>
-                  </a:lnTo>
-                  <a:lnTo>
-                    <a:pt x="6446027" y="130206"/>
-                  </a:lnTo>
-                  <a:lnTo>
-                    <a:pt x="6517649" y="116320"/>
-                  </a:lnTo>
-                  <a:lnTo>
-                    <a:pt x="6589272" y="102292"/>
-                  </a:lnTo>
-                  <a:lnTo>
-                    <a:pt x="6660894" y="88120"/>
-                  </a:lnTo>
-                  <a:lnTo>
-                    <a:pt x="6732517" y="73804"/>
-                  </a:lnTo>
-                  <a:lnTo>
-                    <a:pt x="6804139" y="59342"/>
-                  </a:lnTo>
-                  <a:lnTo>
-                    <a:pt x="6875762" y="44732"/>
-                  </a:lnTo>
-                  <a:lnTo>
-                    <a:pt x="6947385" y="29972"/>
-                  </a:lnTo>
-                  <a:lnTo>
-                    <a:pt x="7019007" y="15062"/>
+                    <a:pt x="71622" y="935277"/>
+                  </a:lnTo>
+                  <a:lnTo>
+                    <a:pt x="143245" y="929667"/>
+                  </a:lnTo>
+                  <a:lnTo>
+                    <a:pt x="214867" y="923999"/>
+                  </a:lnTo>
+                  <a:lnTo>
+                    <a:pt x="286490" y="918273"/>
+                  </a:lnTo>
+                  <a:lnTo>
+                    <a:pt x="358112" y="912490"/>
+                  </a:lnTo>
+                  <a:lnTo>
+                    <a:pt x="429735" y="906647"/>
+                  </a:lnTo>
+                  <a:lnTo>
+                    <a:pt x="501357" y="900746"/>
+                  </a:lnTo>
+                  <a:lnTo>
+                    <a:pt x="572980" y="894784"/>
+                  </a:lnTo>
+                  <a:lnTo>
+                    <a:pt x="644602" y="888761"/>
+                  </a:lnTo>
+                  <a:lnTo>
+                    <a:pt x="716225" y="882678"/>
+                  </a:lnTo>
+                  <a:lnTo>
+                    <a:pt x="787847" y="876532"/>
+                  </a:lnTo>
+                  <a:lnTo>
+                    <a:pt x="859470" y="870324"/>
+                  </a:lnTo>
+                  <a:lnTo>
+                    <a:pt x="931092" y="864053"/>
+                  </a:lnTo>
+                  <a:lnTo>
+                    <a:pt x="1002715" y="857718"/>
+                  </a:lnTo>
+                  <a:lnTo>
+                    <a:pt x="1074337" y="851319"/>
+                  </a:lnTo>
+                  <a:lnTo>
+                    <a:pt x="1145960" y="844855"/>
+                  </a:lnTo>
+                  <a:lnTo>
+                    <a:pt x="1217582" y="838325"/>
+                  </a:lnTo>
+                  <a:lnTo>
+                    <a:pt x="1289205" y="831728"/>
+                  </a:lnTo>
+                  <a:lnTo>
+                    <a:pt x="1360827" y="825065"/>
+                  </a:lnTo>
+                  <a:lnTo>
+                    <a:pt x="1432450" y="818334"/>
+                  </a:lnTo>
+                  <a:lnTo>
+                    <a:pt x="1504073" y="811534"/>
+                  </a:lnTo>
+                  <a:lnTo>
+                    <a:pt x="1575695" y="804665"/>
+                  </a:lnTo>
+                  <a:lnTo>
+                    <a:pt x="1647318" y="797727"/>
+                  </a:lnTo>
+                  <a:lnTo>
+                    <a:pt x="1718940" y="790717"/>
+                  </a:lnTo>
+                  <a:lnTo>
+                    <a:pt x="1790563" y="783637"/>
+                  </a:lnTo>
+                  <a:lnTo>
+                    <a:pt x="1862185" y="776485"/>
+                  </a:lnTo>
+                  <a:lnTo>
+                    <a:pt x="1933808" y="769259"/>
+                  </a:lnTo>
+                  <a:lnTo>
+                    <a:pt x="2005430" y="761961"/>
+                  </a:lnTo>
+                  <a:lnTo>
+                    <a:pt x="2077053" y="754588"/>
+                  </a:lnTo>
+                  <a:lnTo>
+                    <a:pt x="2148675" y="747140"/>
+                  </a:lnTo>
+                  <a:lnTo>
+                    <a:pt x="2220298" y="739617"/>
+                  </a:lnTo>
+                  <a:lnTo>
+                    <a:pt x="2291920" y="732017"/>
+                  </a:lnTo>
+                  <a:lnTo>
+                    <a:pt x="2363543" y="724340"/>
+                  </a:lnTo>
+                  <a:lnTo>
+                    <a:pt x="2435165" y="716585"/>
+                  </a:lnTo>
+                  <a:lnTo>
+                    <a:pt x="2506788" y="708751"/>
+                  </a:lnTo>
+                  <a:lnTo>
+                    <a:pt x="2578410" y="700837"/>
+                  </a:lnTo>
+                  <a:lnTo>
+                    <a:pt x="2650033" y="692843"/>
+                  </a:lnTo>
+                  <a:lnTo>
+                    <a:pt x="2721655" y="684767"/>
+                  </a:lnTo>
+                  <a:lnTo>
+                    <a:pt x="2793278" y="676610"/>
+                  </a:lnTo>
+                  <a:lnTo>
+                    <a:pt x="2864901" y="668369"/>
+                  </a:lnTo>
+                  <a:lnTo>
+                    <a:pt x="2936523" y="660045"/>
+                  </a:lnTo>
+                  <a:lnTo>
+                    <a:pt x="3008146" y="651636"/>
+                  </a:lnTo>
+                  <a:lnTo>
+                    <a:pt x="3079768" y="643142"/>
+                  </a:lnTo>
+                  <a:lnTo>
+                    <a:pt x="3151391" y="634561"/>
+                  </a:lnTo>
+                  <a:lnTo>
+                    <a:pt x="3223013" y="625893"/>
+                  </a:lnTo>
+                  <a:lnTo>
+                    <a:pt x="3294636" y="617137"/>
+                  </a:lnTo>
+                  <a:lnTo>
+                    <a:pt x="3366258" y="608292"/>
+                  </a:lnTo>
+                  <a:lnTo>
+                    <a:pt x="3437881" y="599357"/>
+                  </a:lnTo>
+                  <a:lnTo>
+                    <a:pt x="3509503" y="590331"/>
+                  </a:lnTo>
+                  <a:lnTo>
+                    <a:pt x="3581126" y="581213"/>
+                  </a:lnTo>
+                  <a:lnTo>
+                    <a:pt x="3652748" y="572003"/>
+                  </a:lnTo>
+                  <a:lnTo>
+                    <a:pt x="3724371" y="562699"/>
+                  </a:lnTo>
+                  <a:lnTo>
+                    <a:pt x="3795993" y="553300"/>
+                  </a:lnTo>
+                  <a:lnTo>
+                    <a:pt x="3867616" y="543806"/>
+                  </a:lnTo>
+                  <a:lnTo>
+                    <a:pt x="3939238" y="534216"/>
+                  </a:lnTo>
+                  <a:lnTo>
+                    <a:pt x="4010861" y="524528"/>
+                  </a:lnTo>
+                  <a:lnTo>
+                    <a:pt x="4082483" y="514741"/>
+                  </a:lnTo>
+                  <a:lnTo>
+                    <a:pt x="4154106" y="504855"/>
+                  </a:lnTo>
+                  <a:lnTo>
+                    <a:pt x="4225729" y="494868"/>
+                  </a:lnTo>
+                  <a:lnTo>
+                    <a:pt x="4297351" y="484780"/>
+                  </a:lnTo>
+                  <a:lnTo>
+                    <a:pt x="4368974" y="474589"/>
+                  </a:lnTo>
+                  <a:lnTo>
+                    <a:pt x="4440596" y="464295"/>
+                  </a:lnTo>
+                  <a:lnTo>
+                    <a:pt x="4512219" y="453896"/>
+                  </a:lnTo>
+                  <a:lnTo>
+                    <a:pt x="4583841" y="443392"/>
+                  </a:lnTo>
+                  <a:lnTo>
+                    <a:pt x="4655464" y="432780"/>
+                  </a:lnTo>
+                  <a:lnTo>
+                    <a:pt x="4727086" y="422061"/>
+                  </a:lnTo>
+                  <a:lnTo>
+                    <a:pt x="4798709" y="411232"/>
+                  </a:lnTo>
+                  <a:lnTo>
+                    <a:pt x="4870331" y="400294"/>
+                  </a:lnTo>
+                  <a:lnTo>
+                    <a:pt x="4941954" y="389244"/>
+                  </a:lnTo>
+                  <a:lnTo>
+                    <a:pt x="5013576" y="378082"/>
+                  </a:lnTo>
+                  <a:lnTo>
+                    <a:pt x="5085199" y="366807"/>
+                  </a:lnTo>
+                  <a:lnTo>
+                    <a:pt x="5156821" y="355417"/>
+                  </a:lnTo>
+                  <a:lnTo>
+                    <a:pt x="5228444" y="343911"/>
+                  </a:lnTo>
+                  <a:lnTo>
+                    <a:pt x="5300066" y="332288"/>
+                  </a:lnTo>
+                  <a:lnTo>
+                    <a:pt x="5371689" y="320547"/>
+                  </a:lnTo>
+                  <a:lnTo>
+                    <a:pt x="5443311" y="308687"/>
+                  </a:lnTo>
+                  <a:lnTo>
+                    <a:pt x="5514934" y="296706"/>
+                  </a:lnTo>
+                  <a:lnTo>
+                    <a:pt x="5586557" y="284603"/>
+                  </a:lnTo>
+                  <a:lnTo>
+                    <a:pt x="5658179" y="272377"/>
+                  </a:lnTo>
+                  <a:lnTo>
+                    <a:pt x="5729802" y="260027"/>
+                  </a:lnTo>
+                  <a:lnTo>
+                    <a:pt x="5801424" y="247551"/>
+                  </a:lnTo>
+                  <a:lnTo>
+                    <a:pt x="5873047" y="234949"/>
+                  </a:lnTo>
+                  <a:lnTo>
+                    <a:pt x="5944669" y="222218"/>
+                  </a:lnTo>
+                  <a:lnTo>
+                    <a:pt x="6016292" y="209358"/>
+                  </a:lnTo>
+                  <a:lnTo>
+                    <a:pt x="6087914" y="196368"/>
+                  </a:lnTo>
+                  <a:lnTo>
+                    <a:pt x="6159537" y="183245"/>
+                  </a:lnTo>
+                  <a:lnTo>
+                    <a:pt x="6231159" y="169988"/>
+                  </a:lnTo>
+                  <a:lnTo>
+                    <a:pt x="6302782" y="156597"/>
+                  </a:lnTo>
+                  <a:lnTo>
+                    <a:pt x="6374404" y="143070"/>
+                  </a:lnTo>
+                  <a:lnTo>
+                    <a:pt x="6446027" y="129406"/>
+                  </a:lnTo>
+                  <a:lnTo>
+                    <a:pt x="6517649" y="115602"/>
+                  </a:lnTo>
+                  <a:lnTo>
+                    <a:pt x="6589272" y="101658"/>
+                  </a:lnTo>
+                  <a:lnTo>
+                    <a:pt x="6660894" y="87572"/>
+                  </a:lnTo>
+                  <a:lnTo>
+                    <a:pt x="6732517" y="73343"/>
+                  </a:lnTo>
+                  <a:lnTo>
+                    <a:pt x="6804139" y="58970"/>
+                  </a:lnTo>
+                  <a:lnTo>
+                    <a:pt x="6875762" y="44450"/>
+                  </a:lnTo>
+                  <a:lnTo>
+                    <a:pt x="6947385" y="29783"/>
+                  </a:lnTo>
+                  <a:lnTo>
+                    <a:pt x="7019007" y="14967"/>
                   </a:lnTo>
                   <a:lnTo>
                     <a:pt x="7090630" y="0"/>
@@ -4566,7 +4560,7 @@
           </p:nvSpPr>
           <p:spPr>
             <a:xfrm>
-              <a:off x="4472293" y="1896563"/>
+              <a:off x="4463824" y="1896563"/>
               <a:ext cx="0" cy="3826579"/>
             </a:xfrm>
             <a:custGeom>
@@ -4839,7 +4833,7 @@
           </p:nvSpPr>
           <p:spPr>
             <a:xfrm>
-              <a:off x="2004858" y="5785772"/>
+              <a:off x="2005445" y="5785772"/>
               <a:ext cx="223753" cy="80101"/>
             </a:xfrm>
             <a:prstGeom prst="rect">
@@ -4885,7 +4879,7 @@
           </p:nvSpPr>
           <p:spPr>
             <a:xfrm>
-              <a:off x="4499764" y="5785772"/>
+              <a:off x="4497209" y="5785772"/>
               <a:ext cx="62179" cy="80101"/>
             </a:xfrm>
             <a:prstGeom prst="rect">
@@ -4931,7 +4925,7 @@
           </p:nvSpPr>
           <p:spPr>
             <a:xfrm>
-              <a:off x="6851704" y="5785772"/>
+              <a:off x="6846007" y="5785772"/>
               <a:ext cx="186537" cy="80101"/>
             </a:xfrm>
             <a:prstGeom prst="rect">
